--- a/CSE281/Lecture 10.pptx
+++ b/CSE281/Lecture 10.pptx
@@ -5,7 +5,7 @@
     <p:sldMasterId id="2147483648" r:id="rId1"/>
   </p:sldMasterIdLst>
   <p:notesMasterIdLst>
-    <p:notesMasterId r:id="rId18"/>
+    <p:notesMasterId r:id="rId20"/>
   </p:notesMasterIdLst>
   <p:sldIdLst>
     <p:sldId id="256" r:id="rId2"/>
@@ -17,23 +17,25 @@
     <p:sldId id="268" r:id="rId8"/>
     <p:sldId id="266" r:id="rId9"/>
     <p:sldId id="269" r:id="rId10"/>
-    <p:sldId id="270" r:id="rId11"/>
-    <p:sldId id="271" r:id="rId12"/>
-    <p:sldId id="261" r:id="rId13"/>
-    <p:sldId id="262" r:id="rId14"/>
-    <p:sldId id="263" r:id="rId15"/>
-    <p:sldId id="264" r:id="rId16"/>
-    <p:sldId id="265" r:id="rId17"/>
+    <p:sldId id="273" r:id="rId11"/>
+    <p:sldId id="270" r:id="rId12"/>
+    <p:sldId id="271" r:id="rId13"/>
+    <p:sldId id="261" r:id="rId14"/>
+    <p:sldId id="262" r:id="rId15"/>
+    <p:sldId id="263" r:id="rId16"/>
+    <p:sldId id="272" r:id="rId17"/>
+    <p:sldId id="264" r:id="rId18"/>
+    <p:sldId id="265" r:id="rId19"/>
   </p:sldIdLst>
   <p:sldSz cx="12192000" cy="6858000"/>
   <p:notesSz cx="6858000" cy="9144000"/>
   <p:embeddedFontLst>
     <p:embeddedFont>
       <p:font typeface="Century Gothic" panose="020B0502020202020204" pitchFamily="34" charset="0"/>
-      <p:regular r:id="rId19"/>
-      <p:bold r:id="rId20"/>
-      <p:italic r:id="rId21"/>
-      <p:boldItalic r:id="rId22"/>
+      <p:regular r:id="rId21"/>
+      <p:bold r:id="rId22"/>
+      <p:italic r:id="rId23"/>
+      <p:boldItalic r:id="rId24"/>
     </p:embeddedFont>
   </p:embeddedFontLst>
   <p:defaultTextStyle>
@@ -267,7 +269,7 @@
   </p:defaultTextStyle>
   <p:extLst>
     <p:ext uri="GoogleSlidesCustomDataVersion2">
-      <go:slidesCustomData xmlns:go="http://customooxmlschemas.google.com/" xmlns:ahyp="http://schemas.microsoft.com/office/drawing/2018/hyperlinkcolor" xmlns:p15="http://schemas.microsoft.com/office/powerpoint/2012/main" xmlns:p14="http://schemas.microsoft.com/office/powerpoint/2010/main" xmlns:com="http://schemas.openxmlformats.org/drawingml/2006/compatibility" xmlns:pvml="urn:schemas-microsoft-com:office:powerpoint" xmlns:v="urn:schemas-microsoft-com:vml" xmlns:o="urn:schemas-microsoft-com:office:office" xmlns:dgm="http://schemas.openxmlformats.org/drawingml/2006/diagram" xmlns:c="http://schemas.openxmlformats.org/drawingml/2006/chart" xmlns:mv="urn:schemas-microsoft-com:mac:vml" xmlns:mc="http://schemas.openxmlformats.org/markup-compatibility/2006" xmlns="" r:id="rId23" roundtripDataSignature="AMtx7mjItnNF+FWnZGGAu0CzS2xhWw4Ofw=="/>
+      <go:slidesCustomData xmlns:go="http://customooxmlschemas.google.com/" xmlns:ahyp="http://schemas.microsoft.com/office/drawing/2018/hyperlinkcolor" xmlns:p15="http://schemas.microsoft.com/office/powerpoint/2012/main" xmlns:p14="http://schemas.microsoft.com/office/powerpoint/2010/main" xmlns:com="http://schemas.openxmlformats.org/drawingml/2006/compatibility" xmlns:pvml="urn:schemas-microsoft-com:office:powerpoint" xmlns:v="urn:schemas-microsoft-com:vml" xmlns:o="urn:schemas-microsoft-com:office:office" xmlns:dgm="http://schemas.openxmlformats.org/drawingml/2006/diagram" xmlns:c="http://schemas.openxmlformats.org/drawingml/2006/chart" xmlns:mv="urn:schemas-microsoft-com:mac:vml" xmlns:mc="http://schemas.openxmlformats.org/markup-compatibility/2006" xmlns="" r:id="rId25" roundtripDataSignature="AMtx7mjItnNF+FWnZGGAu0CzS2xhWw4Ofw=="/>
     </p:ext>
   </p:extLst>
 </p:presentation>
@@ -826,6 +828,133 @@
         <p:cNvPr id="1" name="Shape 167">
           <a:extLst>
             <a:ext uri="{FF2B5EF4-FFF2-40B4-BE49-F238E27FC236}">
+              <a16:creationId xmlns:a16="http://schemas.microsoft.com/office/drawing/2014/main" id="{6D258014-C14F-78A2-BCE1-8B2A161CF271}"/>
+            </a:ext>
+          </a:extLst>
+        </p:cNvPr>
+        <p:cNvGrpSpPr/>
+        <p:nvPr/>
+      </p:nvGrpSpPr>
+      <p:grpSpPr>
+        <a:xfrm>
+          <a:off x="0" y="0"/>
+          <a:ext cx="0" cy="0"/>
+          <a:chOff x="0" y="0"/>
+          <a:chExt cx="0" cy="0"/>
+        </a:xfrm>
+      </p:grpSpPr>
+      <p:sp>
+        <p:nvSpPr>
+          <p:cNvPr id="168" name="Google Shape;168;p5:notes">
+            <a:extLst>
+              <a:ext uri="{FF2B5EF4-FFF2-40B4-BE49-F238E27FC236}">
+                <a16:creationId xmlns:a16="http://schemas.microsoft.com/office/drawing/2014/main" id="{01F569F4-5C68-54F4-B544-3124C8369A26}"/>
+              </a:ext>
+            </a:extLst>
+          </p:cNvPr>
+          <p:cNvSpPr txBox="1">
+            <a:spLocks noGrp="1"/>
+          </p:cNvSpPr>
+          <p:nvPr>
+            <p:ph type="body" idx="1"/>
+          </p:nvPr>
+        </p:nvSpPr>
+        <p:spPr>
+          <a:xfrm>
+            <a:off x="685800" y="4343400"/>
+            <a:ext cx="5486400" cy="4114800"/>
+          </a:xfrm>
+          <a:prstGeom prst="rect">
+            <a:avLst/>
+          </a:prstGeom>
+        </p:spPr>
+        <p:txBody>
+          <a:bodyPr spcFirstLastPara="1" wrap="square" lIns="91425" tIns="91425" rIns="91425" bIns="91425" anchor="t" anchorCtr="0">
+            <a:noAutofit/>
+          </a:bodyPr>
+          <a:lstStyle/>
+          <a:p>
+            <a:pPr marL="0" lvl="0" indent="0" algn="l" rtl="0">
+              <a:spcBef>
+                <a:spcPts val="0"/>
+              </a:spcBef>
+              <a:spcAft>
+                <a:spcPts val="0"/>
+              </a:spcAft>
+              <a:buNone/>
+            </a:pPr>
+            <a:endParaRPr/>
+          </a:p>
+        </p:txBody>
+      </p:sp>
+      <p:sp>
+        <p:nvSpPr>
+          <p:cNvPr id="169" name="Google Shape;169;p5:notes">
+            <a:extLst>
+              <a:ext uri="{FF2B5EF4-FFF2-40B4-BE49-F238E27FC236}">
+                <a16:creationId xmlns:a16="http://schemas.microsoft.com/office/drawing/2014/main" id="{6EC56E7D-54EA-C73D-AB8E-ACB1664C6A81}"/>
+              </a:ext>
+            </a:extLst>
+          </p:cNvPr>
+          <p:cNvSpPr>
+            <a:spLocks noGrp="1" noRot="1" noChangeAspect="1"/>
+          </p:cNvSpPr>
+          <p:nvPr>
+            <p:ph type="sldImg" idx="2"/>
+          </p:nvPr>
+        </p:nvSpPr>
+        <p:spPr>
+          <a:xfrm>
+            <a:off x="381000" y="685800"/>
+            <a:ext cx="6096000" cy="3429000"/>
+          </a:xfrm>
+          <a:custGeom>
+            <a:avLst/>
+            <a:gdLst/>
+            <a:ahLst/>
+            <a:cxnLst/>
+            <a:rect l="l" t="t" r="r" b="b"/>
+            <a:pathLst>
+              <a:path w="120000" h="120000" extrusionOk="0">
+                <a:moveTo>
+                  <a:pt x="0" y="0"/>
+                </a:moveTo>
+                <a:lnTo>
+                  <a:pt x="120000" y="0"/>
+                </a:lnTo>
+                <a:lnTo>
+                  <a:pt x="120000" y="120000"/>
+                </a:lnTo>
+                <a:lnTo>
+                  <a:pt x="0" y="120000"/>
+                </a:lnTo>
+                <a:close/>
+              </a:path>
+            </a:pathLst>
+          </a:custGeom>
+        </p:spPr>
+      </p:sp>
+    </p:spTree>
+    <p:extLst>
+      <p:ext uri="{BB962C8B-B14F-4D97-AF65-F5344CB8AC3E}">
+        <p14:creationId xmlns:p14="http://schemas.microsoft.com/office/powerpoint/2010/main" val="1150255280"/>
+      </p:ext>
+    </p:extLst>
+  </p:cSld>
+  <p:clrMapOvr>
+    <a:masterClrMapping/>
+  </p:clrMapOvr>
+</p:notes>
+</file>
+
+<file path=ppt/notesSlides/notesSlide11.xml><?xml version="1.0" encoding="utf-8"?>
+<p:notes xmlns:a="http://schemas.openxmlformats.org/drawingml/2006/main" xmlns:r="http://schemas.openxmlformats.org/officeDocument/2006/relationships" xmlns:p="http://schemas.openxmlformats.org/presentationml/2006/main" showMasterSp="0" showMasterPhAnim="0">
+  <p:cSld>
+    <p:spTree>
+      <p:nvGrpSpPr>
+        <p:cNvPr id="1" name="Shape 167">
+          <a:extLst>
+            <a:ext uri="{FF2B5EF4-FFF2-40B4-BE49-F238E27FC236}">
               <a16:creationId xmlns:a16="http://schemas.microsoft.com/office/drawing/2014/main" id="{F8BC9EAA-3115-A626-3795-9FB867175003}"/>
             </a:ext>
           </a:extLst>
@@ -945,7 +1074,7 @@
 </p:notes>
 </file>
 
-<file path=ppt/notesSlides/notesSlide11.xml><?xml version="1.0" encoding="utf-8"?>
+<file path=ppt/notesSlides/notesSlide12.xml><?xml version="1.0" encoding="utf-8"?>
 <p:notes xmlns:a="http://schemas.openxmlformats.org/drawingml/2006/main" xmlns:r="http://schemas.openxmlformats.org/officeDocument/2006/relationships" xmlns:p="http://schemas.openxmlformats.org/presentationml/2006/main" showMasterSp="0" showMasterPhAnim="0">
   <p:cSld>
     <p:spTree>
@@ -1072,7 +1201,7 @@
 </p:notes>
 </file>
 
-<file path=ppt/notesSlides/notesSlide12.xml><?xml version="1.0" encoding="utf-8"?>
+<file path=ppt/notesSlides/notesSlide13.xml><?xml version="1.0" encoding="utf-8"?>
 <p:notes xmlns:a="http://schemas.openxmlformats.org/drawingml/2006/main" xmlns:r="http://schemas.openxmlformats.org/officeDocument/2006/relationships" xmlns:p="http://schemas.openxmlformats.org/presentationml/2006/main" showMasterSp="0" showMasterPhAnim="0">
   <p:cSld>
     <p:spTree>
@@ -1176,7 +1305,7 @@
 </p:notes>
 </file>
 
-<file path=ppt/notesSlides/notesSlide13.xml><?xml version="1.0" encoding="utf-8"?>
+<file path=ppt/notesSlides/notesSlide14.xml><?xml version="1.0" encoding="utf-8"?>
 <p:notes xmlns:a="http://schemas.openxmlformats.org/drawingml/2006/main" xmlns:r="http://schemas.openxmlformats.org/officeDocument/2006/relationships" xmlns:p="http://schemas.openxmlformats.org/presentationml/2006/main" showMasterSp="0" showMasterPhAnim="0">
   <p:cSld>
     <p:spTree>
@@ -1280,7 +1409,7 @@
 </p:notes>
 </file>
 
-<file path=ppt/notesSlides/notesSlide14.xml><?xml version="1.0" encoding="utf-8"?>
+<file path=ppt/notesSlides/notesSlide15.xml><?xml version="1.0" encoding="utf-8"?>
 <p:notes xmlns:a="http://schemas.openxmlformats.org/drawingml/2006/main" xmlns:r="http://schemas.openxmlformats.org/officeDocument/2006/relationships" xmlns:p="http://schemas.openxmlformats.org/presentationml/2006/main" showMasterSp="0" showMasterPhAnim="0">
   <p:cSld>
     <p:spTree>
@@ -1384,7 +1513,134 @@
 </p:notes>
 </file>
 
-<file path=ppt/notesSlides/notesSlide15.xml><?xml version="1.0" encoding="utf-8"?>
+<file path=ppt/notesSlides/notesSlide16.xml><?xml version="1.0" encoding="utf-8"?>
+<p:notes xmlns:a="http://schemas.openxmlformats.org/drawingml/2006/main" xmlns:r="http://schemas.openxmlformats.org/officeDocument/2006/relationships" xmlns:p="http://schemas.openxmlformats.org/presentationml/2006/main" showMasterSp="0" showMasterPhAnim="0">
+  <p:cSld>
+    <p:spTree>
+      <p:nvGrpSpPr>
+        <p:cNvPr id="1" name="Shape 167">
+          <a:extLst>
+            <a:ext uri="{FF2B5EF4-FFF2-40B4-BE49-F238E27FC236}">
+              <a16:creationId xmlns:a16="http://schemas.microsoft.com/office/drawing/2014/main" id="{BC8B2A22-EC52-D987-96B6-D57AF749622B}"/>
+            </a:ext>
+          </a:extLst>
+        </p:cNvPr>
+        <p:cNvGrpSpPr/>
+        <p:nvPr/>
+      </p:nvGrpSpPr>
+      <p:grpSpPr>
+        <a:xfrm>
+          <a:off x="0" y="0"/>
+          <a:ext cx="0" cy="0"/>
+          <a:chOff x="0" y="0"/>
+          <a:chExt cx="0" cy="0"/>
+        </a:xfrm>
+      </p:grpSpPr>
+      <p:sp>
+        <p:nvSpPr>
+          <p:cNvPr id="168" name="Google Shape;168;p5:notes">
+            <a:extLst>
+              <a:ext uri="{FF2B5EF4-FFF2-40B4-BE49-F238E27FC236}">
+                <a16:creationId xmlns:a16="http://schemas.microsoft.com/office/drawing/2014/main" id="{9AE3ABD9-F7F2-4D04-1C5C-E5E64D7FCE54}"/>
+              </a:ext>
+            </a:extLst>
+          </p:cNvPr>
+          <p:cNvSpPr txBox="1">
+            <a:spLocks noGrp="1"/>
+          </p:cNvSpPr>
+          <p:nvPr>
+            <p:ph type="body" idx="1"/>
+          </p:nvPr>
+        </p:nvSpPr>
+        <p:spPr>
+          <a:xfrm>
+            <a:off x="685800" y="4343400"/>
+            <a:ext cx="5486400" cy="4114800"/>
+          </a:xfrm>
+          <a:prstGeom prst="rect">
+            <a:avLst/>
+          </a:prstGeom>
+        </p:spPr>
+        <p:txBody>
+          <a:bodyPr spcFirstLastPara="1" wrap="square" lIns="91425" tIns="91425" rIns="91425" bIns="91425" anchor="t" anchorCtr="0">
+            <a:noAutofit/>
+          </a:bodyPr>
+          <a:lstStyle/>
+          <a:p>
+            <a:pPr marL="0" lvl="0" indent="0" algn="l" rtl="0">
+              <a:spcBef>
+                <a:spcPts val="0"/>
+              </a:spcBef>
+              <a:spcAft>
+                <a:spcPts val="0"/>
+              </a:spcAft>
+              <a:buNone/>
+            </a:pPr>
+            <a:endParaRPr/>
+          </a:p>
+        </p:txBody>
+      </p:sp>
+      <p:sp>
+        <p:nvSpPr>
+          <p:cNvPr id="169" name="Google Shape;169;p5:notes">
+            <a:extLst>
+              <a:ext uri="{FF2B5EF4-FFF2-40B4-BE49-F238E27FC236}">
+                <a16:creationId xmlns:a16="http://schemas.microsoft.com/office/drawing/2014/main" id="{99F9CA78-372C-744E-D1C5-28194DCB7C67}"/>
+              </a:ext>
+            </a:extLst>
+          </p:cNvPr>
+          <p:cNvSpPr>
+            <a:spLocks noGrp="1" noRot="1" noChangeAspect="1"/>
+          </p:cNvSpPr>
+          <p:nvPr>
+            <p:ph type="sldImg" idx="2"/>
+          </p:nvPr>
+        </p:nvSpPr>
+        <p:spPr>
+          <a:xfrm>
+            <a:off x="381000" y="685800"/>
+            <a:ext cx="6096000" cy="3429000"/>
+          </a:xfrm>
+          <a:custGeom>
+            <a:avLst/>
+            <a:gdLst/>
+            <a:ahLst/>
+            <a:cxnLst/>
+            <a:rect l="l" t="t" r="r" b="b"/>
+            <a:pathLst>
+              <a:path w="120000" h="120000" extrusionOk="0">
+                <a:moveTo>
+                  <a:pt x="0" y="0"/>
+                </a:moveTo>
+                <a:lnTo>
+                  <a:pt x="120000" y="0"/>
+                </a:lnTo>
+                <a:lnTo>
+                  <a:pt x="120000" y="120000"/>
+                </a:lnTo>
+                <a:lnTo>
+                  <a:pt x="0" y="120000"/>
+                </a:lnTo>
+                <a:close/>
+              </a:path>
+            </a:pathLst>
+          </a:custGeom>
+        </p:spPr>
+      </p:sp>
+    </p:spTree>
+    <p:extLst>
+      <p:ext uri="{BB962C8B-B14F-4D97-AF65-F5344CB8AC3E}">
+        <p14:creationId xmlns:p14="http://schemas.microsoft.com/office/powerpoint/2010/main" val="2354700120"/>
+      </p:ext>
+    </p:extLst>
+  </p:cSld>
+  <p:clrMapOvr>
+    <a:masterClrMapping/>
+  </p:clrMapOvr>
+</p:notes>
+</file>
+
+<file path=ppt/notesSlides/notesSlide17.xml><?xml version="1.0" encoding="utf-8"?>
 <p:notes xmlns:a="http://schemas.openxmlformats.org/drawingml/2006/main" xmlns:r="http://schemas.openxmlformats.org/officeDocument/2006/relationships" xmlns:p="http://schemas.openxmlformats.org/presentationml/2006/main" showMasterSp="0" showMasterPhAnim="0">
   <p:cSld>
     <p:spTree>
@@ -1488,7 +1744,7 @@
 </p:notes>
 </file>
 
-<file path=ppt/notesSlides/notesSlide16.xml><?xml version="1.0" encoding="utf-8"?>
+<file path=ppt/notesSlides/notesSlide18.xml><?xml version="1.0" encoding="utf-8"?>
 <p:notes xmlns:a="http://schemas.openxmlformats.org/drawingml/2006/main" xmlns:r="http://schemas.openxmlformats.org/officeDocument/2006/relationships" xmlns:p="http://schemas.openxmlformats.org/presentationml/2006/main" showMasterSp="0" showMasterPhAnim="0">
   <p:cSld>
     <p:spTree>
@@ -19765,6 +20021,1281 @@
         <p:cNvPr id="1" name="Shape 170">
           <a:extLst>
             <a:ext uri="{FF2B5EF4-FFF2-40B4-BE49-F238E27FC236}">
+              <a16:creationId xmlns:a16="http://schemas.microsoft.com/office/drawing/2014/main" id="{B36DBC44-724C-1034-5716-6EC8EE54FB06}"/>
+            </a:ext>
+          </a:extLst>
+        </p:cNvPr>
+        <p:cNvGrpSpPr/>
+        <p:nvPr/>
+      </p:nvGrpSpPr>
+      <p:grpSpPr>
+        <a:xfrm>
+          <a:off x="0" y="0"/>
+          <a:ext cx="0" cy="0"/>
+          <a:chOff x="0" y="0"/>
+          <a:chExt cx="0" cy="0"/>
+        </a:xfrm>
+      </p:grpSpPr>
+      <p:sp>
+        <p:nvSpPr>
+          <p:cNvPr id="3" name="TextBox 2">
+            <a:extLst>
+              <a:ext uri="{FF2B5EF4-FFF2-40B4-BE49-F238E27FC236}">
+                <a16:creationId xmlns:a16="http://schemas.microsoft.com/office/drawing/2014/main" id="{17A3142B-6FDD-1020-87DB-E040DF2A6414}"/>
+              </a:ext>
+            </a:extLst>
+          </p:cNvPr>
+          <p:cNvSpPr txBox="1"/>
+          <p:nvPr/>
+        </p:nvSpPr>
+        <p:spPr>
+          <a:xfrm>
+            <a:off x="5530986" y="302359"/>
+            <a:ext cx="7682418" cy="6555641"/>
+          </a:xfrm>
+          <a:prstGeom prst="rect">
+            <a:avLst/>
+          </a:prstGeom>
+          <a:noFill/>
+        </p:spPr>
+        <p:txBody>
+          <a:bodyPr wrap="square">
+            <a:spAutoFit/>
+          </a:bodyPr>
+          <a:lstStyle/>
+          <a:p>
+            <a:pPr>
+              <a:buNone/>
+            </a:pPr>
+            <a:r>
+              <a:rPr lang="en-US" sz="2000" dirty="0">
+                <a:solidFill>
+                  <a:srgbClr val="0033B3"/>
+                </a:solidFill>
+                <a:effectLst/>
+                <a:latin typeface="JetBrains Mono"/>
+              </a:rPr>
+              <a:t>interface </a:t>
+            </a:r>
+            <a:r>
+              <a:rPr lang="en-US" sz="2000" dirty="0">
+                <a:solidFill>
+                  <a:srgbClr val="000000"/>
+                </a:solidFill>
+                <a:effectLst/>
+                <a:latin typeface="JetBrains Mono"/>
+              </a:rPr>
+              <a:t>Shape</a:t>
+            </a:r>
+            <a:r>
+              <a:rPr lang="en-US" sz="2000" dirty="0">
+                <a:solidFill>
+                  <a:srgbClr val="080808"/>
+                </a:solidFill>
+                <a:effectLst/>
+                <a:latin typeface="JetBrains Mono"/>
+              </a:rPr>
+              <a:t>{</a:t>
+            </a:r>
+            <a:br>
+              <a:rPr lang="en-US" sz="2000" dirty="0">
+                <a:solidFill>
+                  <a:srgbClr val="080808"/>
+                </a:solidFill>
+                <a:effectLst/>
+                <a:latin typeface="JetBrains Mono"/>
+              </a:rPr>
+            </a:br>
+            <a:r>
+              <a:rPr lang="en-US" sz="2000" dirty="0">
+                <a:solidFill>
+                  <a:srgbClr val="080808"/>
+                </a:solidFill>
+                <a:effectLst/>
+                <a:latin typeface="JetBrains Mono"/>
+              </a:rPr>
+              <a:t>    </a:t>
+            </a:r>
+            <a:r>
+              <a:rPr lang="en-US" sz="2000" dirty="0">
+                <a:solidFill>
+                  <a:srgbClr val="0033B3"/>
+                </a:solidFill>
+                <a:effectLst/>
+                <a:latin typeface="JetBrains Mono"/>
+              </a:rPr>
+              <a:t>double </a:t>
+            </a:r>
+            <a:r>
+              <a:rPr lang="en-US" sz="2000" i="1" dirty="0">
+                <a:solidFill>
+                  <a:srgbClr val="871094"/>
+                </a:solidFill>
+                <a:effectLst/>
+                <a:latin typeface="JetBrains Mono"/>
+              </a:rPr>
+              <a:t>pi </a:t>
+            </a:r>
+            <a:r>
+              <a:rPr lang="en-US" sz="2000" dirty="0">
+                <a:solidFill>
+                  <a:srgbClr val="080808"/>
+                </a:solidFill>
+                <a:effectLst/>
+                <a:latin typeface="JetBrains Mono"/>
+              </a:rPr>
+              <a:t>= </a:t>
+            </a:r>
+            <a:r>
+              <a:rPr lang="en-US" sz="2000" dirty="0">
+                <a:solidFill>
+                  <a:srgbClr val="1750EB"/>
+                </a:solidFill>
+                <a:effectLst/>
+                <a:latin typeface="JetBrains Mono"/>
+              </a:rPr>
+              <a:t>3.1416</a:t>
+            </a:r>
+            <a:r>
+              <a:rPr lang="en-US" sz="2000" dirty="0">
+                <a:solidFill>
+                  <a:srgbClr val="080808"/>
+                </a:solidFill>
+                <a:effectLst/>
+                <a:latin typeface="JetBrains Mono"/>
+              </a:rPr>
+              <a:t>;</a:t>
+            </a:r>
+            <a:br>
+              <a:rPr lang="en-US" sz="2000" dirty="0">
+                <a:solidFill>
+                  <a:srgbClr val="080808"/>
+                </a:solidFill>
+                <a:effectLst/>
+                <a:latin typeface="JetBrains Mono"/>
+              </a:rPr>
+            </a:br>
+            <a:r>
+              <a:rPr lang="en-US" sz="2000" dirty="0">
+                <a:solidFill>
+                  <a:srgbClr val="080808"/>
+                </a:solidFill>
+                <a:effectLst/>
+                <a:latin typeface="JetBrains Mono"/>
+              </a:rPr>
+              <a:t>    </a:t>
+            </a:r>
+            <a:r>
+              <a:rPr lang="en-US" sz="2000" dirty="0">
+                <a:solidFill>
+                  <a:srgbClr val="0033B3"/>
+                </a:solidFill>
+                <a:effectLst/>
+                <a:latin typeface="JetBrains Mono"/>
+              </a:rPr>
+              <a:t>double </a:t>
+            </a:r>
+            <a:r>
+              <a:rPr lang="en-US" sz="2000" dirty="0">
+                <a:solidFill>
+                  <a:srgbClr val="00627A"/>
+                </a:solidFill>
+                <a:effectLst/>
+                <a:latin typeface="JetBrains Mono"/>
+              </a:rPr>
+              <a:t>area</a:t>
+            </a:r>
+            <a:r>
+              <a:rPr lang="en-US" sz="2000" dirty="0">
+                <a:solidFill>
+                  <a:srgbClr val="080808"/>
+                </a:solidFill>
+                <a:effectLst/>
+                <a:latin typeface="JetBrains Mono"/>
+              </a:rPr>
+              <a:t>();</a:t>
+            </a:r>
+            <a:br>
+              <a:rPr lang="en-US" sz="2000" dirty="0">
+                <a:solidFill>
+                  <a:srgbClr val="080808"/>
+                </a:solidFill>
+                <a:effectLst/>
+                <a:latin typeface="JetBrains Mono"/>
+              </a:rPr>
+            </a:br>
+            <a:r>
+              <a:rPr lang="en-US" sz="2000" dirty="0">
+                <a:solidFill>
+                  <a:srgbClr val="080808"/>
+                </a:solidFill>
+                <a:effectLst/>
+                <a:latin typeface="JetBrains Mono"/>
+              </a:rPr>
+              <a:t>}</a:t>
+            </a:r>
+            <a:br>
+              <a:rPr lang="en-US" sz="2000" dirty="0">
+                <a:solidFill>
+                  <a:srgbClr val="080808"/>
+                </a:solidFill>
+                <a:effectLst/>
+                <a:latin typeface="JetBrains Mono"/>
+              </a:rPr>
+            </a:br>
+            <a:r>
+              <a:rPr lang="en-US" sz="2000" dirty="0">
+                <a:solidFill>
+                  <a:srgbClr val="0033B3"/>
+                </a:solidFill>
+                <a:effectLst/>
+                <a:latin typeface="JetBrains Mono"/>
+              </a:rPr>
+              <a:t>class </a:t>
+            </a:r>
+            <a:r>
+              <a:rPr lang="en-US" sz="2000" dirty="0">
+                <a:solidFill>
+                  <a:srgbClr val="000000"/>
+                </a:solidFill>
+                <a:effectLst/>
+                <a:latin typeface="JetBrains Mono"/>
+              </a:rPr>
+              <a:t>Circle </a:t>
+            </a:r>
+            <a:r>
+              <a:rPr lang="en-US" sz="2000" dirty="0">
+                <a:solidFill>
+                  <a:srgbClr val="0033B3"/>
+                </a:solidFill>
+                <a:effectLst/>
+                <a:latin typeface="JetBrains Mono"/>
+              </a:rPr>
+              <a:t>implements </a:t>
+            </a:r>
+            <a:r>
+              <a:rPr lang="en-US" sz="2000" dirty="0">
+                <a:solidFill>
+                  <a:srgbClr val="000000"/>
+                </a:solidFill>
+                <a:effectLst/>
+                <a:latin typeface="JetBrains Mono"/>
+              </a:rPr>
+              <a:t>Shape</a:t>
+            </a:r>
+            <a:r>
+              <a:rPr lang="en-US" sz="2000" dirty="0">
+                <a:solidFill>
+                  <a:srgbClr val="080808"/>
+                </a:solidFill>
+                <a:effectLst/>
+                <a:latin typeface="JetBrains Mono"/>
+              </a:rPr>
+              <a:t>{</a:t>
+            </a:r>
+            <a:br>
+              <a:rPr lang="en-US" sz="2000" dirty="0">
+                <a:solidFill>
+                  <a:srgbClr val="080808"/>
+                </a:solidFill>
+                <a:effectLst/>
+                <a:latin typeface="JetBrains Mono"/>
+              </a:rPr>
+            </a:br>
+            <a:r>
+              <a:rPr lang="en-US" sz="2000" dirty="0">
+                <a:solidFill>
+                  <a:srgbClr val="080808"/>
+                </a:solidFill>
+                <a:effectLst/>
+                <a:latin typeface="JetBrains Mono"/>
+              </a:rPr>
+              <a:t>    </a:t>
+            </a:r>
+            <a:r>
+              <a:rPr lang="en-US" sz="2000" dirty="0">
+                <a:solidFill>
+                  <a:srgbClr val="0033B3"/>
+                </a:solidFill>
+                <a:effectLst/>
+                <a:latin typeface="JetBrains Mono"/>
+              </a:rPr>
+              <a:t>double </a:t>
+            </a:r>
+            <a:r>
+              <a:rPr lang="en-US" sz="2000" dirty="0">
+                <a:solidFill>
+                  <a:srgbClr val="871094"/>
+                </a:solidFill>
+                <a:effectLst/>
+                <a:latin typeface="JetBrains Mono"/>
+              </a:rPr>
+              <a:t>r</a:t>
+            </a:r>
+            <a:r>
+              <a:rPr lang="en-US" sz="2000" dirty="0">
+                <a:solidFill>
+                  <a:srgbClr val="080808"/>
+                </a:solidFill>
+                <a:effectLst/>
+                <a:latin typeface="JetBrains Mono"/>
+              </a:rPr>
+              <a:t>=</a:t>
+            </a:r>
+            <a:r>
+              <a:rPr lang="en-US" sz="2000" dirty="0">
+                <a:solidFill>
+                  <a:srgbClr val="1750EB"/>
+                </a:solidFill>
+                <a:effectLst/>
+                <a:latin typeface="JetBrains Mono"/>
+              </a:rPr>
+              <a:t>2</a:t>
+            </a:r>
+            <a:r>
+              <a:rPr lang="en-US" sz="2000" dirty="0">
+                <a:solidFill>
+                  <a:srgbClr val="080808"/>
+                </a:solidFill>
+                <a:effectLst/>
+                <a:latin typeface="JetBrains Mono"/>
+              </a:rPr>
+              <a:t>;</a:t>
+            </a:r>
+            <a:br>
+              <a:rPr lang="en-US" sz="2000" dirty="0">
+                <a:solidFill>
+                  <a:srgbClr val="080808"/>
+                </a:solidFill>
+                <a:effectLst/>
+                <a:latin typeface="JetBrains Mono"/>
+              </a:rPr>
+            </a:br>
+            <a:r>
+              <a:rPr lang="en-US" sz="2000" dirty="0">
+                <a:solidFill>
+                  <a:srgbClr val="080808"/>
+                </a:solidFill>
+                <a:effectLst/>
+                <a:latin typeface="JetBrains Mono"/>
+              </a:rPr>
+              <a:t>    </a:t>
+            </a:r>
+            <a:r>
+              <a:rPr lang="en-US" sz="2000" dirty="0">
+                <a:solidFill>
+                  <a:srgbClr val="0033B3"/>
+                </a:solidFill>
+                <a:effectLst/>
+                <a:latin typeface="JetBrains Mono"/>
+              </a:rPr>
+              <a:t>public double </a:t>
+            </a:r>
+            <a:r>
+              <a:rPr lang="en-US" sz="2000" dirty="0">
+                <a:solidFill>
+                  <a:srgbClr val="00627A"/>
+                </a:solidFill>
+                <a:effectLst/>
+                <a:latin typeface="JetBrains Mono"/>
+              </a:rPr>
+              <a:t>area</a:t>
+            </a:r>
+            <a:r>
+              <a:rPr lang="en-US" sz="2000" dirty="0">
+                <a:solidFill>
+                  <a:srgbClr val="080808"/>
+                </a:solidFill>
+                <a:effectLst/>
+                <a:latin typeface="JetBrains Mono"/>
+              </a:rPr>
+              <a:t>()</a:t>
+            </a:r>
+            <a:br>
+              <a:rPr lang="en-US" sz="2000" dirty="0">
+                <a:solidFill>
+                  <a:srgbClr val="080808"/>
+                </a:solidFill>
+                <a:effectLst/>
+                <a:latin typeface="JetBrains Mono"/>
+              </a:rPr>
+            </a:br>
+            <a:r>
+              <a:rPr lang="en-US" sz="2000" dirty="0">
+                <a:solidFill>
+                  <a:srgbClr val="080808"/>
+                </a:solidFill>
+                <a:effectLst/>
+                <a:latin typeface="JetBrains Mono"/>
+              </a:rPr>
+              <a:t>    {</a:t>
+            </a:r>
+            <a:br>
+              <a:rPr lang="en-US" sz="2000" dirty="0">
+                <a:solidFill>
+                  <a:srgbClr val="080808"/>
+                </a:solidFill>
+                <a:effectLst/>
+                <a:latin typeface="JetBrains Mono"/>
+              </a:rPr>
+            </a:br>
+            <a:r>
+              <a:rPr lang="en-US" sz="2000" dirty="0">
+                <a:solidFill>
+                  <a:srgbClr val="080808"/>
+                </a:solidFill>
+                <a:effectLst/>
+                <a:latin typeface="JetBrains Mono"/>
+              </a:rPr>
+              <a:t>        </a:t>
+            </a:r>
+            <a:r>
+              <a:rPr lang="en-US" sz="2000" dirty="0">
+                <a:solidFill>
+                  <a:srgbClr val="0033B3"/>
+                </a:solidFill>
+                <a:effectLst/>
+                <a:latin typeface="JetBrains Mono"/>
+              </a:rPr>
+              <a:t>return </a:t>
+            </a:r>
+            <a:r>
+              <a:rPr lang="en-US" sz="2000" i="1" dirty="0">
+                <a:solidFill>
+                  <a:srgbClr val="871094"/>
+                </a:solidFill>
+                <a:effectLst/>
+                <a:latin typeface="JetBrains Mono"/>
+              </a:rPr>
+              <a:t>pi</a:t>
+            </a:r>
+            <a:r>
+              <a:rPr lang="en-US" sz="2000" dirty="0">
+                <a:solidFill>
+                  <a:srgbClr val="080808"/>
+                </a:solidFill>
+                <a:effectLst/>
+                <a:latin typeface="JetBrains Mono"/>
+              </a:rPr>
+              <a:t>*</a:t>
+            </a:r>
+            <a:r>
+              <a:rPr lang="en-US" sz="2000" dirty="0">
+                <a:solidFill>
+                  <a:srgbClr val="871094"/>
+                </a:solidFill>
+                <a:effectLst/>
+                <a:latin typeface="JetBrains Mono"/>
+              </a:rPr>
+              <a:t>r</a:t>
+            </a:r>
+            <a:r>
+              <a:rPr lang="en-US" sz="2000" dirty="0">
+                <a:solidFill>
+                  <a:srgbClr val="080808"/>
+                </a:solidFill>
+                <a:effectLst/>
+                <a:latin typeface="JetBrains Mono"/>
+              </a:rPr>
+              <a:t>*</a:t>
+            </a:r>
+            <a:r>
+              <a:rPr lang="en-US" sz="2000" dirty="0">
+                <a:solidFill>
+                  <a:srgbClr val="871094"/>
+                </a:solidFill>
+                <a:effectLst/>
+                <a:latin typeface="JetBrains Mono"/>
+              </a:rPr>
+              <a:t>r</a:t>
+            </a:r>
+            <a:r>
+              <a:rPr lang="en-US" sz="2000" dirty="0">
+                <a:solidFill>
+                  <a:srgbClr val="080808"/>
+                </a:solidFill>
+                <a:effectLst/>
+                <a:latin typeface="JetBrains Mono"/>
+              </a:rPr>
+              <a:t>;</a:t>
+            </a:r>
+            <a:br>
+              <a:rPr lang="en-US" sz="2000" dirty="0">
+                <a:solidFill>
+                  <a:srgbClr val="080808"/>
+                </a:solidFill>
+                <a:effectLst/>
+                <a:latin typeface="JetBrains Mono"/>
+              </a:rPr>
+            </a:br>
+            <a:r>
+              <a:rPr lang="en-US" sz="2000" dirty="0">
+                <a:solidFill>
+                  <a:srgbClr val="080808"/>
+                </a:solidFill>
+                <a:effectLst/>
+                <a:latin typeface="JetBrains Mono"/>
+              </a:rPr>
+              <a:t>    }</a:t>
+            </a:r>
+            <a:br>
+              <a:rPr lang="en-US" sz="2000" dirty="0">
+                <a:solidFill>
+                  <a:srgbClr val="080808"/>
+                </a:solidFill>
+                <a:effectLst/>
+                <a:latin typeface="JetBrains Mono"/>
+              </a:rPr>
+            </a:br>
+            <a:r>
+              <a:rPr lang="en-US" sz="2000" dirty="0">
+                <a:solidFill>
+                  <a:srgbClr val="080808"/>
+                </a:solidFill>
+                <a:effectLst/>
+                <a:latin typeface="JetBrains Mono"/>
+              </a:rPr>
+              <a:t>}</a:t>
+            </a:r>
+            <a:br>
+              <a:rPr lang="en-US" sz="2000" dirty="0">
+                <a:solidFill>
+                  <a:srgbClr val="080808"/>
+                </a:solidFill>
+                <a:effectLst/>
+                <a:latin typeface="JetBrains Mono"/>
+              </a:rPr>
+            </a:br>
+            <a:br>
+              <a:rPr lang="en-US" sz="2000" dirty="0">
+                <a:solidFill>
+                  <a:srgbClr val="080808"/>
+                </a:solidFill>
+                <a:effectLst/>
+                <a:latin typeface="JetBrains Mono"/>
+              </a:rPr>
+            </a:br>
+            <a:r>
+              <a:rPr lang="en-US" sz="2000" dirty="0">
+                <a:solidFill>
+                  <a:srgbClr val="0033B3"/>
+                </a:solidFill>
+                <a:effectLst/>
+                <a:latin typeface="JetBrains Mono"/>
+              </a:rPr>
+              <a:t>public class </a:t>
+            </a:r>
+            <a:r>
+              <a:rPr lang="en-US" sz="2000" dirty="0">
+                <a:solidFill>
+                  <a:srgbClr val="000000"/>
+                </a:solidFill>
+                <a:effectLst/>
+                <a:latin typeface="JetBrains Mono"/>
+              </a:rPr>
+              <a:t>Main </a:t>
+            </a:r>
+            <a:r>
+              <a:rPr lang="en-US" sz="2000" dirty="0">
+                <a:solidFill>
+                  <a:srgbClr val="080808"/>
+                </a:solidFill>
+                <a:effectLst/>
+                <a:latin typeface="JetBrains Mono"/>
+              </a:rPr>
+              <a:t>{</a:t>
+            </a:r>
+            <a:br>
+              <a:rPr lang="en-US" sz="2000" dirty="0">
+                <a:solidFill>
+                  <a:srgbClr val="080808"/>
+                </a:solidFill>
+                <a:effectLst/>
+                <a:latin typeface="JetBrains Mono"/>
+              </a:rPr>
+            </a:br>
+            <a:r>
+              <a:rPr lang="en-US" sz="2000" dirty="0">
+                <a:solidFill>
+                  <a:srgbClr val="080808"/>
+                </a:solidFill>
+                <a:effectLst/>
+                <a:latin typeface="JetBrains Mono"/>
+              </a:rPr>
+              <a:t>    </a:t>
+            </a:r>
+            <a:r>
+              <a:rPr lang="en-US" sz="2000" dirty="0">
+                <a:solidFill>
+                  <a:srgbClr val="0033B3"/>
+                </a:solidFill>
+                <a:effectLst/>
+                <a:latin typeface="JetBrains Mono"/>
+              </a:rPr>
+              <a:t>public static void </a:t>
+            </a:r>
+            <a:r>
+              <a:rPr lang="en-US" sz="2000" dirty="0">
+                <a:solidFill>
+                  <a:srgbClr val="00627A"/>
+                </a:solidFill>
+                <a:effectLst/>
+                <a:latin typeface="JetBrains Mono"/>
+              </a:rPr>
+              <a:t>main</a:t>
+            </a:r>
+            <a:r>
+              <a:rPr lang="en-US" sz="2000" dirty="0">
+                <a:solidFill>
+                  <a:srgbClr val="080808"/>
+                </a:solidFill>
+                <a:effectLst/>
+                <a:latin typeface="JetBrains Mono"/>
+              </a:rPr>
+              <a:t>(</a:t>
+            </a:r>
+            <a:r>
+              <a:rPr lang="en-US" sz="2000" dirty="0">
+                <a:solidFill>
+                  <a:srgbClr val="000000"/>
+                </a:solidFill>
+                <a:effectLst/>
+                <a:latin typeface="JetBrains Mono"/>
+              </a:rPr>
+              <a:t>String</a:t>
+            </a:r>
+            <a:r>
+              <a:rPr lang="en-US" sz="2000" dirty="0">
+                <a:solidFill>
+                  <a:srgbClr val="080808"/>
+                </a:solidFill>
+                <a:effectLst/>
+                <a:latin typeface="JetBrains Mono"/>
+              </a:rPr>
+              <a:t>[] </a:t>
+            </a:r>
+            <a:r>
+              <a:rPr lang="en-US" sz="2000" dirty="0" err="1">
+                <a:solidFill>
+                  <a:srgbClr val="000000"/>
+                </a:solidFill>
+                <a:effectLst/>
+                <a:latin typeface="JetBrains Mono"/>
+              </a:rPr>
+              <a:t>args</a:t>
+            </a:r>
+            <a:r>
+              <a:rPr lang="en-US" sz="2000" dirty="0">
+                <a:solidFill>
+                  <a:srgbClr val="080808"/>
+                </a:solidFill>
+                <a:effectLst/>
+                <a:latin typeface="JetBrains Mono"/>
+              </a:rPr>
+              <a:t>)</a:t>
+            </a:r>
+            <a:br>
+              <a:rPr lang="en-US" sz="2000" dirty="0">
+                <a:solidFill>
+                  <a:srgbClr val="080808"/>
+                </a:solidFill>
+                <a:effectLst/>
+                <a:latin typeface="JetBrains Mono"/>
+              </a:rPr>
+            </a:br>
+            <a:r>
+              <a:rPr lang="en-US" sz="2000" dirty="0">
+                <a:solidFill>
+                  <a:srgbClr val="080808"/>
+                </a:solidFill>
+                <a:effectLst/>
+                <a:latin typeface="JetBrains Mono"/>
+              </a:rPr>
+              <a:t>    {</a:t>
+            </a:r>
+            <a:br>
+              <a:rPr lang="en-US" sz="2000" dirty="0">
+                <a:solidFill>
+                  <a:srgbClr val="080808"/>
+                </a:solidFill>
+                <a:effectLst/>
+                <a:latin typeface="JetBrains Mono"/>
+              </a:rPr>
+            </a:br>
+            <a:r>
+              <a:rPr lang="en-US" sz="2000" dirty="0">
+                <a:solidFill>
+                  <a:srgbClr val="080808"/>
+                </a:solidFill>
+                <a:effectLst/>
+                <a:latin typeface="JetBrains Mono"/>
+              </a:rPr>
+              <a:t>        </a:t>
+            </a:r>
+            <a:r>
+              <a:rPr lang="en-US" sz="2000" dirty="0">
+                <a:solidFill>
+                  <a:srgbClr val="000000"/>
+                </a:solidFill>
+                <a:effectLst/>
+                <a:latin typeface="JetBrains Mono"/>
+              </a:rPr>
+              <a:t>Circle c </a:t>
+            </a:r>
+            <a:r>
+              <a:rPr lang="en-US" sz="2000" dirty="0">
+                <a:solidFill>
+                  <a:srgbClr val="080808"/>
+                </a:solidFill>
+                <a:effectLst/>
+                <a:latin typeface="JetBrains Mono"/>
+              </a:rPr>
+              <a:t>= </a:t>
+            </a:r>
+            <a:r>
+              <a:rPr lang="en-US" sz="2000" dirty="0">
+                <a:solidFill>
+                  <a:srgbClr val="0033B3"/>
+                </a:solidFill>
+                <a:effectLst/>
+                <a:latin typeface="JetBrains Mono"/>
+              </a:rPr>
+              <a:t>new </a:t>
+            </a:r>
+            <a:r>
+              <a:rPr lang="en-US" sz="2000" dirty="0">
+                <a:solidFill>
+                  <a:srgbClr val="080808"/>
+                </a:solidFill>
+                <a:effectLst/>
+                <a:latin typeface="JetBrains Mono"/>
+              </a:rPr>
+              <a:t>Circle();</a:t>
+            </a:r>
+            <a:br>
+              <a:rPr lang="en-US" sz="2000" dirty="0">
+                <a:solidFill>
+                  <a:srgbClr val="080808"/>
+                </a:solidFill>
+                <a:effectLst/>
+                <a:latin typeface="JetBrains Mono"/>
+              </a:rPr>
+            </a:br>
+            <a:r>
+              <a:rPr lang="en-US" sz="2000" dirty="0">
+                <a:solidFill>
+                  <a:srgbClr val="080808"/>
+                </a:solidFill>
+                <a:effectLst/>
+                <a:latin typeface="JetBrains Mono"/>
+              </a:rPr>
+              <a:t>        </a:t>
+            </a:r>
+            <a:r>
+              <a:rPr lang="en-US" sz="2000" dirty="0" err="1">
+                <a:solidFill>
+                  <a:srgbClr val="000000"/>
+                </a:solidFill>
+                <a:effectLst/>
+                <a:latin typeface="JetBrains Mono"/>
+              </a:rPr>
+              <a:t>System</a:t>
+            </a:r>
+            <a:r>
+              <a:rPr lang="en-US" sz="2000" dirty="0" err="1">
+                <a:solidFill>
+                  <a:srgbClr val="080808"/>
+                </a:solidFill>
+                <a:effectLst/>
+                <a:latin typeface="JetBrains Mono"/>
+              </a:rPr>
+              <a:t>.</a:t>
+            </a:r>
+            <a:r>
+              <a:rPr lang="en-US" sz="2000" i="1" dirty="0" err="1">
+                <a:solidFill>
+                  <a:srgbClr val="871094"/>
+                </a:solidFill>
+                <a:effectLst/>
+                <a:latin typeface="JetBrains Mono"/>
+              </a:rPr>
+              <a:t>out</a:t>
+            </a:r>
+            <a:r>
+              <a:rPr lang="en-US" sz="2000" dirty="0" err="1">
+                <a:solidFill>
+                  <a:srgbClr val="080808"/>
+                </a:solidFill>
+                <a:effectLst/>
+                <a:latin typeface="JetBrains Mono"/>
+              </a:rPr>
+              <a:t>.println</a:t>
+            </a:r>
+            <a:r>
+              <a:rPr lang="en-US" sz="2000" dirty="0">
+                <a:solidFill>
+                  <a:srgbClr val="080808"/>
+                </a:solidFill>
+                <a:effectLst/>
+                <a:latin typeface="JetBrains Mono"/>
+              </a:rPr>
+              <a:t>(</a:t>
+            </a:r>
+            <a:r>
+              <a:rPr lang="en-US" sz="2000" dirty="0" err="1">
+                <a:solidFill>
+                  <a:srgbClr val="000000"/>
+                </a:solidFill>
+                <a:effectLst/>
+                <a:latin typeface="JetBrains Mono"/>
+              </a:rPr>
+              <a:t>c</a:t>
+            </a:r>
+            <a:r>
+              <a:rPr lang="en-US" sz="2000" dirty="0" err="1">
+                <a:solidFill>
+                  <a:srgbClr val="080808"/>
+                </a:solidFill>
+                <a:effectLst/>
+                <a:latin typeface="JetBrains Mono"/>
+              </a:rPr>
+              <a:t>.area</a:t>
+            </a:r>
+            <a:r>
+              <a:rPr lang="en-US" sz="2000" dirty="0">
+                <a:solidFill>
+                  <a:srgbClr val="080808"/>
+                </a:solidFill>
+                <a:effectLst/>
+                <a:latin typeface="JetBrains Mono"/>
+              </a:rPr>
+              <a:t>());;</a:t>
+            </a:r>
+            <a:br>
+              <a:rPr lang="en-US" sz="2000" dirty="0">
+                <a:solidFill>
+                  <a:srgbClr val="080808"/>
+                </a:solidFill>
+                <a:effectLst/>
+                <a:latin typeface="JetBrains Mono"/>
+              </a:rPr>
+            </a:br>
+            <a:r>
+              <a:rPr lang="en-US" sz="2000" dirty="0">
+                <a:solidFill>
+                  <a:srgbClr val="080808"/>
+                </a:solidFill>
+                <a:effectLst/>
+                <a:latin typeface="JetBrains Mono"/>
+              </a:rPr>
+              <a:t>        </a:t>
+            </a:r>
+            <a:r>
+              <a:rPr lang="en-US" sz="2000" dirty="0" err="1">
+                <a:solidFill>
+                  <a:srgbClr val="000000"/>
+                </a:solidFill>
+                <a:effectLst/>
+                <a:latin typeface="JetBrains Mono"/>
+              </a:rPr>
+              <a:t>System</a:t>
+            </a:r>
+            <a:r>
+              <a:rPr lang="en-US" sz="2000" dirty="0" err="1">
+                <a:solidFill>
+                  <a:srgbClr val="080808"/>
+                </a:solidFill>
+                <a:effectLst/>
+                <a:latin typeface="JetBrains Mono"/>
+              </a:rPr>
+              <a:t>.</a:t>
+            </a:r>
+            <a:r>
+              <a:rPr lang="en-US" sz="2000" i="1" dirty="0" err="1">
+                <a:solidFill>
+                  <a:srgbClr val="871094"/>
+                </a:solidFill>
+                <a:effectLst/>
+                <a:latin typeface="JetBrains Mono"/>
+              </a:rPr>
+              <a:t>out</a:t>
+            </a:r>
+            <a:r>
+              <a:rPr lang="en-US" sz="2000" dirty="0" err="1">
+                <a:solidFill>
+                  <a:srgbClr val="080808"/>
+                </a:solidFill>
+                <a:effectLst/>
+                <a:latin typeface="JetBrains Mono"/>
+              </a:rPr>
+              <a:t>.println</a:t>
+            </a:r>
+            <a:r>
+              <a:rPr lang="en-US" sz="2000" dirty="0">
+                <a:solidFill>
+                  <a:srgbClr val="080808"/>
+                </a:solidFill>
+                <a:effectLst/>
+                <a:latin typeface="JetBrains Mono"/>
+              </a:rPr>
+              <a:t>(</a:t>
+            </a:r>
+            <a:r>
+              <a:rPr lang="en-US" sz="2000" dirty="0" err="1">
+                <a:solidFill>
+                  <a:srgbClr val="000000"/>
+                </a:solidFill>
+                <a:effectLst/>
+                <a:latin typeface="JetBrains Mono"/>
+              </a:rPr>
+              <a:t>Circle</a:t>
+            </a:r>
+            <a:r>
+              <a:rPr lang="en-US" sz="2000" dirty="0" err="1">
+                <a:solidFill>
+                  <a:srgbClr val="080808"/>
+                </a:solidFill>
+                <a:effectLst/>
+                <a:latin typeface="JetBrains Mono"/>
+              </a:rPr>
+              <a:t>.</a:t>
+            </a:r>
+            <a:r>
+              <a:rPr lang="en-US" sz="2000" i="1" dirty="0" err="1">
+                <a:solidFill>
+                  <a:srgbClr val="871094"/>
+                </a:solidFill>
+                <a:effectLst/>
+                <a:latin typeface="JetBrains Mono"/>
+              </a:rPr>
+              <a:t>pi</a:t>
+            </a:r>
+            <a:r>
+              <a:rPr lang="en-US" sz="2000" dirty="0">
+                <a:solidFill>
+                  <a:srgbClr val="080808"/>
+                </a:solidFill>
+                <a:effectLst/>
+                <a:latin typeface="JetBrains Mono"/>
+              </a:rPr>
+              <a:t>);</a:t>
+            </a:r>
+            <a:br>
+              <a:rPr lang="en-US" sz="2000" dirty="0">
+                <a:solidFill>
+                  <a:srgbClr val="080808"/>
+                </a:solidFill>
+                <a:effectLst/>
+                <a:latin typeface="JetBrains Mono"/>
+              </a:rPr>
+            </a:br>
+            <a:r>
+              <a:rPr lang="en-US" sz="2000" dirty="0">
+                <a:solidFill>
+                  <a:srgbClr val="080808"/>
+                </a:solidFill>
+                <a:effectLst/>
+                <a:latin typeface="JetBrains Mono"/>
+              </a:rPr>
+              <a:t>        </a:t>
+            </a:r>
+            <a:r>
+              <a:rPr lang="en-US" sz="2000" dirty="0" err="1">
+                <a:solidFill>
+                  <a:srgbClr val="000000"/>
+                </a:solidFill>
+                <a:effectLst/>
+                <a:latin typeface="JetBrains Mono"/>
+              </a:rPr>
+              <a:t>System</a:t>
+            </a:r>
+            <a:r>
+              <a:rPr lang="en-US" sz="2000" dirty="0" err="1">
+                <a:solidFill>
+                  <a:srgbClr val="080808"/>
+                </a:solidFill>
+                <a:effectLst/>
+                <a:latin typeface="JetBrains Mono"/>
+              </a:rPr>
+              <a:t>.</a:t>
+            </a:r>
+            <a:r>
+              <a:rPr lang="en-US" sz="2000" i="1" dirty="0" err="1">
+                <a:solidFill>
+                  <a:srgbClr val="871094"/>
+                </a:solidFill>
+                <a:effectLst/>
+                <a:latin typeface="JetBrains Mono"/>
+              </a:rPr>
+              <a:t>out</a:t>
+            </a:r>
+            <a:r>
+              <a:rPr lang="en-US" sz="2000" dirty="0" err="1">
+                <a:solidFill>
+                  <a:srgbClr val="080808"/>
+                </a:solidFill>
+                <a:effectLst/>
+                <a:latin typeface="JetBrains Mono"/>
+              </a:rPr>
+              <a:t>.println</a:t>
+            </a:r>
+            <a:r>
+              <a:rPr lang="en-US" sz="2000" dirty="0">
+                <a:solidFill>
+                  <a:srgbClr val="080808"/>
+                </a:solidFill>
+                <a:effectLst/>
+                <a:latin typeface="JetBrains Mono"/>
+              </a:rPr>
+              <a:t>(</a:t>
+            </a:r>
+            <a:r>
+              <a:rPr lang="en-US" sz="2000" dirty="0" err="1">
+                <a:solidFill>
+                  <a:srgbClr val="000000"/>
+                </a:solidFill>
+                <a:effectLst/>
+                <a:latin typeface="JetBrains Mono"/>
+              </a:rPr>
+              <a:t>Shape</a:t>
+            </a:r>
+            <a:r>
+              <a:rPr lang="en-US" sz="2000" dirty="0" err="1">
+                <a:solidFill>
+                  <a:srgbClr val="080808"/>
+                </a:solidFill>
+                <a:effectLst/>
+                <a:latin typeface="JetBrains Mono"/>
+              </a:rPr>
+              <a:t>.</a:t>
+            </a:r>
+            <a:r>
+              <a:rPr lang="en-US" sz="2000" i="1" dirty="0" err="1">
+                <a:solidFill>
+                  <a:srgbClr val="871094"/>
+                </a:solidFill>
+                <a:effectLst/>
+                <a:latin typeface="JetBrains Mono"/>
+              </a:rPr>
+              <a:t>pi</a:t>
+            </a:r>
+            <a:r>
+              <a:rPr lang="en-US" sz="2000" dirty="0">
+                <a:solidFill>
+                  <a:srgbClr val="080808"/>
+                </a:solidFill>
+                <a:effectLst/>
+                <a:latin typeface="JetBrains Mono"/>
+              </a:rPr>
+              <a:t>);</a:t>
+            </a:r>
+            <a:br>
+              <a:rPr lang="en-US" sz="2000" dirty="0">
+                <a:solidFill>
+                  <a:srgbClr val="080808"/>
+                </a:solidFill>
+                <a:effectLst/>
+                <a:latin typeface="JetBrains Mono"/>
+              </a:rPr>
+            </a:br>
+            <a:r>
+              <a:rPr lang="en-US" sz="2000" dirty="0">
+                <a:solidFill>
+                  <a:srgbClr val="080808"/>
+                </a:solidFill>
+                <a:effectLst/>
+                <a:latin typeface="JetBrains Mono"/>
+              </a:rPr>
+              <a:t>    }</a:t>
+            </a:r>
+            <a:br>
+              <a:rPr lang="en-US" sz="2000" dirty="0">
+                <a:solidFill>
+                  <a:srgbClr val="080808"/>
+                </a:solidFill>
+                <a:effectLst/>
+                <a:latin typeface="JetBrains Mono"/>
+              </a:rPr>
+            </a:br>
+            <a:r>
+              <a:rPr lang="en-US" sz="2000" dirty="0">
+                <a:solidFill>
+                  <a:srgbClr val="080808"/>
+                </a:solidFill>
+                <a:effectLst/>
+                <a:latin typeface="JetBrains Mono"/>
+              </a:rPr>
+              <a:t>}</a:t>
+            </a:r>
+          </a:p>
+        </p:txBody>
+      </p:sp>
+      <p:sp>
+        <p:nvSpPr>
+          <p:cNvPr id="4" name="Rectangle 1">
+            <a:extLst>
+              <a:ext uri="{FF2B5EF4-FFF2-40B4-BE49-F238E27FC236}">
+                <a16:creationId xmlns:a16="http://schemas.microsoft.com/office/drawing/2014/main" id="{70CF8965-6216-F30A-B63E-C6391813D785}"/>
+              </a:ext>
+            </a:extLst>
+          </p:cNvPr>
+          <p:cNvSpPr>
+            <a:spLocks noChangeArrowheads="1"/>
+          </p:cNvSpPr>
+          <p:nvPr/>
+        </p:nvSpPr>
+        <p:spPr bwMode="auto">
+          <a:xfrm>
+            <a:off x="97277" y="2610887"/>
+            <a:ext cx="4066161" cy="1754326"/>
+          </a:xfrm>
+          <a:prstGeom prst="rect">
+            <a:avLst/>
+          </a:prstGeom>
+          <a:noFill/>
+          <a:ln>
+            <a:noFill/>
+          </a:ln>
+          <a:effectLst/>
+          <a:extLst>
+            <a:ext uri="{909E8E84-426E-40DD-AFC4-6F175D3DCCD1}">
+              <a14:hiddenFill xmlns:a14="http://schemas.microsoft.com/office/drawing/2010/main">
+                <a:solidFill>
+                  <a:schemeClr val="accent1"/>
+                </a:solidFill>
+              </a14:hiddenFill>
+            </a:ext>
+            <a:ext uri="{91240B29-F687-4F45-9708-019B960494DF}">
+              <a14:hiddenLine xmlns:a14="http://schemas.microsoft.com/office/drawing/2010/main" w="9525">
+                <a:solidFill>
+                  <a:schemeClr val="tx1"/>
+                </a:solidFill>
+                <a:miter lim="800000"/>
+                <a:headEnd/>
+                <a:tailEnd/>
+              </a14:hiddenLine>
+            </a:ext>
+            <a:ext uri="{AF507438-7753-43E0-B8FC-AC1667EBCBE1}">
+              <a14:hiddenEffects xmlns:a14="http://schemas.microsoft.com/office/drawing/2010/main">
+                <a:effectLst>
+                  <a:outerShdw dist="35921" dir="2700000" algn="ctr" rotWithShape="0">
+                    <a:schemeClr val="bg2"/>
+                  </a:outerShdw>
+                </a:effectLst>
+              </a14:hiddenEffects>
+            </a:ext>
+          </a:extLst>
+        </p:spPr>
+        <p:txBody>
+          <a:bodyPr vert="horz" wrap="square" lIns="91440" tIns="45720" rIns="91440" bIns="45720" numCol="1" anchor="ctr" anchorCtr="0" compatLnSpc="1">
+            <a:prstTxWarp prst="textNoShape">
+              <a:avLst/>
+            </a:prstTxWarp>
+            <a:spAutoFit/>
+          </a:bodyPr>
+          <a:lstStyle/>
+          <a:p>
+            <a:pPr marL="285750" lvl="0" indent="-285750">
+              <a:buClr>
+                <a:schemeClr val="dk1"/>
+              </a:buClr>
+              <a:buSzPts val="1800"/>
+              <a:buFont typeface="Arial" panose="020B0604020202020204" pitchFamily="34" charset="0"/>
+              <a:buChar char="•"/>
+            </a:pPr>
+            <a:r>
+              <a:rPr lang="en-US" sz="1800" dirty="0"/>
+              <a:t>Every field in an interface is implicitly </a:t>
+            </a:r>
+            <a:r>
+              <a:rPr lang="en-US" sz="1800" b="1" dirty="0"/>
+              <a:t>public static final</a:t>
+            </a:r>
+            <a:r>
+              <a:rPr lang="en-US" sz="1800" dirty="0"/>
+              <a:t> (constant) </a:t>
+            </a:r>
+          </a:p>
+          <a:p>
+            <a:pPr marL="285750" lvl="0" indent="-285750">
+              <a:buClr>
+                <a:schemeClr val="dk1"/>
+              </a:buClr>
+              <a:buSzPts val="1800"/>
+              <a:buFont typeface="Arial" panose="020B0604020202020204" pitchFamily="34" charset="0"/>
+              <a:buChar char="•"/>
+            </a:pPr>
+            <a:r>
+              <a:rPr lang="en-US" sz="1800" dirty="0"/>
+              <a:t>• Constants can be accessed using </a:t>
+            </a:r>
+            <a:r>
+              <a:rPr lang="en-US" sz="1800" b="1" dirty="0"/>
+              <a:t>interface name</a:t>
+            </a:r>
+            <a:r>
+              <a:rPr lang="en-US" sz="1800" dirty="0"/>
+              <a:t> (preferred) or </a:t>
+            </a:r>
+            <a:r>
+              <a:rPr lang="en-US" sz="1800" b="1" dirty="0"/>
+              <a:t>implementing class name</a:t>
+            </a:r>
+            <a:endParaRPr lang="en-US" sz="1800" dirty="0"/>
+          </a:p>
+        </p:txBody>
+      </p:sp>
+      <p:pic>
+        <p:nvPicPr>
+          <p:cNvPr id="5" name="Picture 4" descr="A white background with black dots&#10;&#10;AI-generated content may be incorrect.">
+            <a:extLst>
+              <a:ext uri="{FF2B5EF4-FFF2-40B4-BE49-F238E27FC236}">
+                <a16:creationId xmlns:a16="http://schemas.microsoft.com/office/drawing/2014/main" id="{E19BF285-686E-9D58-38E2-12C49943C4C3}"/>
+              </a:ext>
+            </a:extLst>
+          </p:cNvPr>
+          <p:cNvPicPr>
+            <a:picLocks noChangeAspect="1"/>
+          </p:cNvPicPr>
+          <p:nvPr/>
+        </p:nvPicPr>
+        <p:blipFill>
+          <a:blip r:embed="rId3"/>
+          <a:stretch>
+            <a:fillRect/>
+          </a:stretch>
+        </p:blipFill>
+        <p:spPr>
+          <a:xfrm>
+            <a:off x="305307" y="5106919"/>
+            <a:ext cx="2943225" cy="904875"/>
+          </a:xfrm>
+          <a:prstGeom prst="rect">
+            <a:avLst/>
+          </a:prstGeom>
+        </p:spPr>
+      </p:pic>
+    </p:spTree>
+    <p:extLst>
+      <p:ext uri="{BB962C8B-B14F-4D97-AF65-F5344CB8AC3E}">
+        <p14:creationId xmlns:p14="http://schemas.microsoft.com/office/powerpoint/2010/main" val="3921895405"/>
+      </p:ext>
+    </p:extLst>
+  </p:cSld>
+  <p:clrMapOvr>
+    <a:masterClrMapping/>
+  </p:clrMapOvr>
+</p:sld>
+</file>
+
+<file path=ppt/slides/slide11.xml><?xml version="1.0" encoding="utf-8"?>
+<p:sld xmlns:a="http://schemas.openxmlformats.org/drawingml/2006/main" xmlns:r="http://schemas.openxmlformats.org/officeDocument/2006/relationships" xmlns:p="http://schemas.openxmlformats.org/presentationml/2006/main">
+  <p:cSld>
+    <p:spTree>
+      <p:nvGrpSpPr>
+        <p:cNvPr id="1" name="Shape 170">
+          <a:extLst>
+            <a:ext uri="{FF2B5EF4-FFF2-40B4-BE49-F238E27FC236}">
               <a16:creationId xmlns:a16="http://schemas.microsoft.com/office/drawing/2014/main" id="{A7DDBEE0-141B-E603-F12B-1C263DCACFF4}"/>
             </a:ext>
           </a:extLst>
@@ -20545,7 +22076,7 @@
 </p:sld>
 </file>
 
-<file path=ppt/slides/slide11.xml><?xml version="1.0" encoding="utf-8"?>
+<file path=ppt/slides/slide12.xml><?xml version="1.0" encoding="utf-8"?>
 <p:sld xmlns:a="http://schemas.openxmlformats.org/drawingml/2006/main" xmlns:r="http://schemas.openxmlformats.org/officeDocument/2006/relationships" xmlns:p="http://schemas.openxmlformats.org/presentationml/2006/main">
   <p:cSld>
     <p:spTree>
@@ -21712,7 +23243,7 @@
 </p:sld>
 </file>
 
-<file path=ppt/slides/slide12.xml><?xml version="1.0" encoding="utf-8"?>
+<file path=ppt/slides/slide13.xml><?xml version="1.0" encoding="utf-8"?>
 <p:sld xmlns:a="http://schemas.openxmlformats.org/drawingml/2006/main" xmlns:r="http://schemas.openxmlformats.org/officeDocument/2006/relationships" xmlns:p="http://schemas.openxmlformats.org/presentationml/2006/main">
   <p:cSld>
     <p:spTree>
@@ -21814,7 +23345,7 @@
 </p:sld>
 </file>
 
-<file path=ppt/slides/slide13.xml><?xml version="1.0" encoding="utf-8"?>
+<file path=ppt/slides/slide14.xml><?xml version="1.0" encoding="utf-8"?>
 <p:sld xmlns:a="http://schemas.openxmlformats.org/drawingml/2006/main" xmlns:r="http://schemas.openxmlformats.org/officeDocument/2006/relationships" xmlns:p="http://schemas.openxmlformats.org/presentationml/2006/main">
   <p:cSld>
     <p:spTree>
@@ -21943,7 +23474,7 @@
 </p:sld>
 </file>
 
-<file path=ppt/slides/slide14.xml><?xml version="1.0" encoding="utf-8"?>
+<file path=ppt/slides/slide15.xml><?xml version="1.0" encoding="utf-8"?>
 <p:sld xmlns:a="http://schemas.openxmlformats.org/drawingml/2006/main" xmlns:r="http://schemas.openxmlformats.org/officeDocument/2006/relationships" xmlns:p="http://schemas.openxmlformats.org/presentationml/2006/main">
   <p:cSld>
     <p:spTree>
@@ -22302,7 +23833,1184 @@
 </p:sld>
 </file>
 
-<file path=ppt/slides/slide15.xml><?xml version="1.0" encoding="utf-8"?>
+<file path=ppt/slides/slide16.xml><?xml version="1.0" encoding="utf-8"?>
+<p:sld xmlns:a="http://schemas.openxmlformats.org/drawingml/2006/main" xmlns:r="http://schemas.openxmlformats.org/officeDocument/2006/relationships" xmlns:p="http://schemas.openxmlformats.org/presentationml/2006/main">
+  <p:cSld>
+    <p:spTree>
+      <p:nvGrpSpPr>
+        <p:cNvPr id="1" name="Shape 170">
+          <a:extLst>
+            <a:ext uri="{FF2B5EF4-FFF2-40B4-BE49-F238E27FC236}">
+              <a16:creationId xmlns:a16="http://schemas.microsoft.com/office/drawing/2014/main" id="{3239DA36-4406-D2A2-9A23-1269C377DDE5}"/>
+            </a:ext>
+          </a:extLst>
+        </p:cNvPr>
+        <p:cNvGrpSpPr/>
+        <p:nvPr/>
+      </p:nvGrpSpPr>
+      <p:grpSpPr>
+        <a:xfrm>
+          <a:off x="0" y="0"/>
+          <a:ext cx="0" cy="0"/>
+          <a:chOff x="0" y="0"/>
+          <a:chExt cx="0" cy="0"/>
+        </a:xfrm>
+      </p:grpSpPr>
+      <p:sp>
+        <p:nvSpPr>
+          <p:cNvPr id="3" name="TextBox 2">
+            <a:extLst>
+              <a:ext uri="{FF2B5EF4-FFF2-40B4-BE49-F238E27FC236}">
+                <a16:creationId xmlns:a16="http://schemas.microsoft.com/office/drawing/2014/main" id="{5ED1EFFB-07E7-8CEA-EF52-622E5CBBCF5E}"/>
+              </a:ext>
+            </a:extLst>
+          </p:cNvPr>
+          <p:cNvSpPr txBox="1"/>
+          <p:nvPr/>
+        </p:nvSpPr>
+        <p:spPr>
+          <a:xfrm>
+            <a:off x="5933872" y="302359"/>
+            <a:ext cx="7682418" cy="6186309"/>
+          </a:xfrm>
+          <a:prstGeom prst="rect">
+            <a:avLst/>
+          </a:prstGeom>
+          <a:noFill/>
+        </p:spPr>
+        <p:txBody>
+          <a:bodyPr wrap="square">
+            <a:spAutoFit/>
+          </a:bodyPr>
+          <a:lstStyle/>
+          <a:p>
+            <a:pPr>
+              <a:buNone/>
+            </a:pPr>
+            <a:r>
+              <a:rPr lang="en-US" sz="1800" dirty="0">
+                <a:solidFill>
+                  <a:srgbClr val="0033B3"/>
+                </a:solidFill>
+                <a:effectLst/>
+                <a:latin typeface="JetBrains Mono"/>
+              </a:rPr>
+              <a:t>interface </a:t>
+            </a:r>
+            <a:r>
+              <a:rPr lang="en-US" sz="1800" dirty="0">
+                <a:solidFill>
+                  <a:srgbClr val="000000"/>
+                </a:solidFill>
+                <a:effectLst/>
+                <a:latin typeface="JetBrains Mono"/>
+              </a:rPr>
+              <a:t>A </a:t>
+            </a:r>
+            <a:r>
+              <a:rPr lang="en-US" sz="1800" dirty="0">
+                <a:solidFill>
+                  <a:srgbClr val="080808"/>
+                </a:solidFill>
+                <a:effectLst/>
+                <a:latin typeface="JetBrains Mono"/>
+              </a:rPr>
+              <a:t>{</a:t>
+            </a:r>
+            <a:br>
+              <a:rPr lang="en-US" sz="1800" dirty="0">
+                <a:solidFill>
+                  <a:srgbClr val="080808"/>
+                </a:solidFill>
+                <a:effectLst/>
+                <a:latin typeface="JetBrains Mono"/>
+              </a:rPr>
+            </a:br>
+            <a:r>
+              <a:rPr lang="en-US" sz="1800" dirty="0">
+                <a:solidFill>
+                  <a:srgbClr val="080808"/>
+                </a:solidFill>
+                <a:effectLst/>
+                <a:latin typeface="JetBrains Mono"/>
+              </a:rPr>
+              <a:t>    </a:t>
+            </a:r>
+            <a:r>
+              <a:rPr lang="en-US" sz="1800" dirty="0">
+                <a:solidFill>
+                  <a:srgbClr val="0033B3"/>
+                </a:solidFill>
+                <a:effectLst/>
+                <a:latin typeface="JetBrains Mono"/>
+              </a:rPr>
+              <a:t>default void </a:t>
+            </a:r>
+            <a:r>
+              <a:rPr lang="en-US" sz="1800" dirty="0">
+                <a:solidFill>
+                  <a:srgbClr val="00627A"/>
+                </a:solidFill>
+                <a:effectLst/>
+                <a:latin typeface="JetBrains Mono"/>
+              </a:rPr>
+              <a:t>show</a:t>
+            </a:r>
+            <a:r>
+              <a:rPr lang="en-US" sz="1800" dirty="0">
+                <a:solidFill>
+                  <a:srgbClr val="080808"/>
+                </a:solidFill>
+                <a:effectLst/>
+                <a:latin typeface="JetBrains Mono"/>
+              </a:rPr>
+              <a:t>() {</a:t>
+            </a:r>
+            <a:br>
+              <a:rPr lang="en-US" sz="1800" dirty="0">
+                <a:solidFill>
+                  <a:srgbClr val="080808"/>
+                </a:solidFill>
+                <a:effectLst/>
+                <a:latin typeface="JetBrains Mono"/>
+              </a:rPr>
+            </a:br>
+            <a:r>
+              <a:rPr lang="en-US" sz="1800" dirty="0">
+                <a:solidFill>
+                  <a:srgbClr val="080808"/>
+                </a:solidFill>
+                <a:effectLst/>
+                <a:latin typeface="JetBrains Mono"/>
+              </a:rPr>
+              <a:t>        </a:t>
+            </a:r>
+            <a:r>
+              <a:rPr lang="en-US" sz="1800" dirty="0" err="1">
+                <a:solidFill>
+                  <a:srgbClr val="000000"/>
+                </a:solidFill>
+                <a:effectLst/>
+                <a:latin typeface="JetBrains Mono"/>
+              </a:rPr>
+              <a:t>System</a:t>
+            </a:r>
+            <a:r>
+              <a:rPr lang="en-US" sz="1800" dirty="0" err="1">
+                <a:solidFill>
+                  <a:srgbClr val="080808"/>
+                </a:solidFill>
+                <a:effectLst/>
+                <a:latin typeface="JetBrains Mono"/>
+              </a:rPr>
+              <a:t>.</a:t>
+            </a:r>
+            <a:r>
+              <a:rPr lang="en-US" sz="1800" i="1" dirty="0" err="1">
+                <a:solidFill>
+                  <a:srgbClr val="871094"/>
+                </a:solidFill>
+                <a:effectLst/>
+                <a:latin typeface="JetBrains Mono"/>
+              </a:rPr>
+              <a:t>out</a:t>
+            </a:r>
+            <a:r>
+              <a:rPr lang="en-US" sz="1800" dirty="0" err="1">
+                <a:solidFill>
+                  <a:srgbClr val="080808"/>
+                </a:solidFill>
+                <a:effectLst/>
+                <a:latin typeface="JetBrains Mono"/>
+              </a:rPr>
+              <a:t>.println</a:t>
+            </a:r>
+            <a:r>
+              <a:rPr lang="en-US" sz="1800" dirty="0">
+                <a:solidFill>
+                  <a:srgbClr val="080808"/>
+                </a:solidFill>
+                <a:effectLst/>
+                <a:latin typeface="JetBrains Mono"/>
+              </a:rPr>
+              <a:t>(</a:t>
+            </a:r>
+            <a:r>
+              <a:rPr lang="en-US" sz="1800" dirty="0">
+                <a:solidFill>
+                  <a:srgbClr val="067D17"/>
+                </a:solidFill>
+                <a:effectLst/>
+                <a:latin typeface="JetBrains Mono"/>
+              </a:rPr>
+              <a:t>"Interface A"</a:t>
+            </a:r>
+            <a:r>
+              <a:rPr lang="en-US" sz="1800" dirty="0">
+                <a:solidFill>
+                  <a:srgbClr val="080808"/>
+                </a:solidFill>
+                <a:effectLst/>
+                <a:latin typeface="JetBrains Mono"/>
+              </a:rPr>
+              <a:t>);</a:t>
+            </a:r>
+            <a:br>
+              <a:rPr lang="en-US" sz="1800" dirty="0">
+                <a:solidFill>
+                  <a:srgbClr val="080808"/>
+                </a:solidFill>
+                <a:effectLst/>
+                <a:latin typeface="JetBrains Mono"/>
+              </a:rPr>
+            </a:br>
+            <a:r>
+              <a:rPr lang="en-US" sz="1800" dirty="0">
+                <a:solidFill>
+                  <a:srgbClr val="080808"/>
+                </a:solidFill>
+                <a:effectLst/>
+                <a:latin typeface="JetBrains Mono"/>
+              </a:rPr>
+              <a:t>    }</a:t>
+            </a:r>
+            <a:br>
+              <a:rPr lang="en-US" sz="1800" dirty="0">
+                <a:solidFill>
+                  <a:srgbClr val="080808"/>
+                </a:solidFill>
+                <a:effectLst/>
+                <a:latin typeface="JetBrains Mono"/>
+              </a:rPr>
+            </a:br>
+            <a:r>
+              <a:rPr lang="en-US" sz="1800" dirty="0">
+                <a:solidFill>
+                  <a:srgbClr val="080808"/>
+                </a:solidFill>
+                <a:effectLst/>
+                <a:latin typeface="JetBrains Mono"/>
+              </a:rPr>
+              <a:t>}</a:t>
+            </a:r>
+            <a:br>
+              <a:rPr lang="en-US" sz="1800" dirty="0">
+                <a:solidFill>
+                  <a:srgbClr val="080808"/>
+                </a:solidFill>
+                <a:effectLst/>
+                <a:latin typeface="JetBrains Mono"/>
+              </a:rPr>
+            </a:br>
+            <a:r>
+              <a:rPr lang="en-US" sz="1800" dirty="0">
+                <a:solidFill>
+                  <a:srgbClr val="0033B3"/>
+                </a:solidFill>
+                <a:effectLst/>
+                <a:latin typeface="JetBrains Mono"/>
+              </a:rPr>
+              <a:t>interface </a:t>
+            </a:r>
+            <a:r>
+              <a:rPr lang="en-US" sz="1800" dirty="0">
+                <a:solidFill>
+                  <a:srgbClr val="000000"/>
+                </a:solidFill>
+                <a:effectLst/>
+                <a:latin typeface="JetBrains Mono"/>
+              </a:rPr>
+              <a:t>B </a:t>
+            </a:r>
+            <a:r>
+              <a:rPr lang="en-US" sz="1800" dirty="0">
+                <a:solidFill>
+                  <a:srgbClr val="080808"/>
+                </a:solidFill>
+                <a:effectLst/>
+                <a:latin typeface="JetBrains Mono"/>
+              </a:rPr>
+              <a:t>{</a:t>
+            </a:r>
+            <a:br>
+              <a:rPr lang="en-US" sz="1800" dirty="0">
+                <a:solidFill>
+                  <a:srgbClr val="080808"/>
+                </a:solidFill>
+                <a:effectLst/>
+                <a:latin typeface="JetBrains Mono"/>
+              </a:rPr>
+            </a:br>
+            <a:r>
+              <a:rPr lang="en-US" sz="1800" dirty="0">
+                <a:solidFill>
+                  <a:srgbClr val="080808"/>
+                </a:solidFill>
+                <a:effectLst/>
+                <a:latin typeface="JetBrains Mono"/>
+              </a:rPr>
+              <a:t>    </a:t>
+            </a:r>
+            <a:r>
+              <a:rPr lang="en-US" sz="1800" dirty="0">
+                <a:solidFill>
+                  <a:srgbClr val="0033B3"/>
+                </a:solidFill>
+                <a:effectLst/>
+                <a:latin typeface="JetBrains Mono"/>
+              </a:rPr>
+              <a:t>default void </a:t>
+            </a:r>
+            <a:r>
+              <a:rPr lang="en-US" sz="1800" dirty="0">
+                <a:solidFill>
+                  <a:srgbClr val="00627A"/>
+                </a:solidFill>
+                <a:effectLst/>
+                <a:latin typeface="JetBrains Mono"/>
+              </a:rPr>
+              <a:t>show</a:t>
+            </a:r>
+            <a:r>
+              <a:rPr lang="en-US" sz="1800" dirty="0">
+                <a:solidFill>
+                  <a:srgbClr val="080808"/>
+                </a:solidFill>
+                <a:effectLst/>
+                <a:latin typeface="JetBrains Mono"/>
+              </a:rPr>
+              <a:t>() {</a:t>
+            </a:r>
+            <a:br>
+              <a:rPr lang="en-US" sz="1800" dirty="0">
+                <a:solidFill>
+                  <a:srgbClr val="080808"/>
+                </a:solidFill>
+                <a:effectLst/>
+                <a:latin typeface="JetBrains Mono"/>
+              </a:rPr>
+            </a:br>
+            <a:r>
+              <a:rPr lang="en-US" sz="1800" dirty="0">
+                <a:solidFill>
+                  <a:srgbClr val="080808"/>
+                </a:solidFill>
+                <a:effectLst/>
+                <a:latin typeface="JetBrains Mono"/>
+              </a:rPr>
+              <a:t>        </a:t>
+            </a:r>
+            <a:r>
+              <a:rPr lang="en-US" sz="1800" dirty="0" err="1">
+                <a:solidFill>
+                  <a:srgbClr val="000000"/>
+                </a:solidFill>
+                <a:effectLst/>
+                <a:latin typeface="JetBrains Mono"/>
+              </a:rPr>
+              <a:t>System</a:t>
+            </a:r>
+            <a:r>
+              <a:rPr lang="en-US" sz="1800" dirty="0" err="1">
+                <a:solidFill>
+                  <a:srgbClr val="080808"/>
+                </a:solidFill>
+                <a:effectLst/>
+                <a:latin typeface="JetBrains Mono"/>
+              </a:rPr>
+              <a:t>.</a:t>
+            </a:r>
+            <a:r>
+              <a:rPr lang="en-US" sz="1800" i="1" dirty="0" err="1">
+                <a:solidFill>
+                  <a:srgbClr val="871094"/>
+                </a:solidFill>
+                <a:effectLst/>
+                <a:latin typeface="JetBrains Mono"/>
+              </a:rPr>
+              <a:t>out</a:t>
+            </a:r>
+            <a:r>
+              <a:rPr lang="en-US" sz="1800" dirty="0" err="1">
+                <a:solidFill>
+                  <a:srgbClr val="080808"/>
+                </a:solidFill>
+                <a:effectLst/>
+                <a:latin typeface="JetBrains Mono"/>
+              </a:rPr>
+              <a:t>.println</a:t>
+            </a:r>
+            <a:r>
+              <a:rPr lang="en-US" sz="1800" dirty="0">
+                <a:solidFill>
+                  <a:srgbClr val="080808"/>
+                </a:solidFill>
+                <a:effectLst/>
+                <a:latin typeface="JetBrains Mono"/>
+              </a:rPr>
+              <a:t>(</a:t>
+            </a:r>
+            <a:r>
+              <a:rPr lang="en-US" sz="1800" dirty="0">
+                <a:solidFill>
+                  <a:srgbClr val="067D17"/>
+                </a:solidFill>
+                <a:effectLst/>
+                <a:latin typeface="JetBrains Mono"/>
+              </a:rPr>
+              <a:t>"Interface B"</a:t>
+            </a:r>
+            <a:r>
+              <a:rPr lang="en-US" sz="1800" dirty="0">
+                <a:solidFill>
+                  <a:srgbClr val="080808"/>
+                </a:solidFill>
+                <a:effectLst/>
+                <a:latin typeface="JetBrains Mono"/>
+              </a:rPr>
+              <a:t>);</a:t>
+            </a:r>
+            <a:br>
+              <a:rPr lang="en-US" sz="1800" dirty="0">
+                <a:solidFill>
+                  <a:srgbClr val="080808"/>
+                </a:solidFill>
+                <a:effectLst/>
+                <a:latin typeface="JetBrains Mono"/>
+              </a:rPr>
+            </a:br>
+            <a:r>
+              <a:rPr lang="en-US" sz="1800" dirty="0">
+                <a:solidFill>
+                  <a:srgbClr val="080808"/>
+                </a:solidFill>
+                <a:effectLst/>
+                <a:latin typeface="JetBrains Mono"/>
+              </a:rPr>
+              <a:t>    }</a:t>
+            </a:r>
+            <a:br>
+              <a:rPr lang="en-US" sz="1800" dirty="0">
+                <a:solidFill>
+                  <a:srgbClr val="080808"/>
+                </a:solidFill>
+                <a:effectLst/>
+                <a:latin typeface="JetBrains Mono"/>
+              </a:rPr>
+            </a:br>
+            <a:r>
+              <a:rPr lang="en-US" sz="1800" dirty="0">
+                <a:solidFill>
+                  <a:srgbClr val="080808"/>
+                </a:solidFill>
+                <a:effectLst/>
+                <a:latin typeface="JetBrains Mono"/>
+              </a:rPr>
+              <a:t>}</a:t>
+            </a:r>
+            <a:br>
+              <a:rPr lang="en-US" sz="1800" dirty="0">
+                <a:solidFill>
+                  <a:srgbClr val="080808"/>
+                </a:solidFill>
+                <a:effectLst/>
+                <a:latin typeface="JetBrains Mono"/>
+              </a:rPr>
+            </a:br>
+            <a:r>
+              <a:rPr lang="en-US" sz="1800" dirty="0">
+                <a:solidFill>
+                  <a:srgbClr val="0033B3"/>
+                </a:solidFill>
+                <a:effectLst/>
+                <a:latin typeface="JetBrains Mono"/>
+              </a:rPr>
+              <a:t>class </a:t>
+            </a:r>
+            <a:r>
+              <a:rPr lang="en-US" sz="1800" dirty="0">
+                <a:solidFill>
+                  <a:srgbClr val="000000"/>
+                </a:solidFill>
+                <a:effectLst/>
+                <a:latin typeface="JetBrains Mono"/>
+              </a:rPr>
+              <a:t>Demo </a:t>
+            </a:r>
+            <a:r>
+              <a:rPr lang="en-US" sz="1800" dirty="0">
+                <a:solidFill>
+                  <a:srgbClr val="0033B3"/>
+                </a:solidFill>
+                <a:effectLst/>
+                <a:latin typeface="JetBrains Mono"/>
+              </a:rPr>
+              <a:t>implements </a:t>
+            </a:r>
+            <a:r>
+              <a:rPr lang="en-US" sz="1800" dirty="0">
+                <a:solidFill>
+                  <a:srgbClr val="000000"/>
+                </a:solidFill>
+                <a:effectLst/>
+                <a:latin typeface="JetBrains Mono"/>
+              </a:rPr>
+              <a:t>A</a:t>
+            </a:r>
+            <a:r>
+              <a:rPr lang="en-US" sz="1800" dirty="0">
+                <a:solidFill>
+                  <a:srgbClr val="080808"/>
+                </a:solidFill>
+                <a:effectLst/>
+                <a:latin typeface="JetBrains Mono"/>
+              </a:rPr>
+              <a:t>, </a:t>
+            </a:r>
+            <a:r>
+              <a:rPr lang="en-US" sz="1800" dirty="0">
+                <a:solidFill>
+                  <a:srgbClr val="000000"/>
+                </a:solidFill>
+                <a:effectLst/>
+                <a:latin typeface="JetBrains Mono"/>
+              </a:rPr>
+              <a:t>B </a:t>
+            </a:r>
+            <a:r>
+              <a:rPr lang="en-US" sz="1800" dirty="0">
+                <a:solidFill>
+                  <a:srgbClr val="080808"/>
+                </a:solidFill>
+                <a:effectLst/>
+                <a:latin typeface="JetBrains Mono"/>
+              </a:rPr>
+              <a:t>{</a:t>
+            </a:r>
+            <a:br>
+              <a:rPr lang="en-US" sz="1800" dirty="0">
+                <a:solidFill>
+                  <a:srgbClr val="080808"/>
+                </a:solidFill>
+                <a:effectLst/>
+                <a:latin typeface="JetBrains Mono"/>
+              </a:rPr>
+            </a:br>
+            <a:r>
+              <a:rPr lang="en-US" sz="1800" dirty="0">
+                <a:solidFill>
+                  <a:srgbClr val="080808"/>
+                </a:solidFill>
+                <a:effectLst/>
+                <a:latin typeface="JetBrains Mono"/>
+              </a:rPr>
+              <a:t>    </a:t>
+            </a:r>
+            <a:r>
+              <a:rPr lang="en-US" sz="1800" dirty="0">
+                <a:solidFill>
+                  <a:srgbClr val="0033B3"/>
+                </a:solidFill>
+                <a:effectLst/>
+                <a:latin typeface="JetBrains Mono"/>
+              </a:rPr>
+              <a:t>public void </a:t>
+            </a:r>
+            <a:r>
+              <a:rPr lang="en-US" sz="1800" dirty="0">
+                <a:solidFill>
+                  <a:srgbClr val="00627A"/>
+                </a:solidFill>
+                <a:effectLst/>
+                <a:latin typeface="JetBrains Mono"/>
+              </a:rPr>
+              <a:t>show</a:t>
+            </a:r>
+            <a:r>
+              <a:rPr lang="en-US" sz="1800" dirty="0">
+                <a:solidFill>
+                  <a:srgbClr val="080808"/>
+                </a:solidFill>
+                <a:effectLst/>
+                <a:latin typeface="JetBrains Mono"/>
+              </a:rPr>
+              <a:t>() {</a:t>
+            </a:r>
+            <a:br>
+              <a:rPr lang="en-US" sz="1800" dirty="0">
+                <a:solidFill>
+                  <a:srgbClr val="080808"/>
+                </a:solidFill>
+                <a:effectLst/>
+                <a:latin typeface="JetBrains Mono"/>
+              </a:rPr>
+            </a:br>
+            <a:r>
+              <a:rPr lang="en-US" sz="1800" dirty="0">
+                <a:solidFill>
+                  <a:srgbClr val="080808"/>
+                </a:solidFill>
+                <a:effectLst/>
+                <a:latin typeface="JetBrains Mono"/>
+              </a:rPr>
+              <a:t>        </a:t>
+            </a:r>
+            <a:r>
+              <a:rPr lang="en-US" sz="1800" dirty="0" err="1">
+                <a:solidFill>
+                  <a:srgbClr val="000000"/>
+                </a:solidFill>
+                <a:effectLst/>
+                <a:latin typeface="JetBrains Mono"/>
+              </a:rPr>
+              <a:t>A</a:t>
+            </a:r>
+            <a:r>
+              <a:rPr lang="en-US" sz="1800" dirty="0" err="1">
+                <a:solidFill>
+                  <a:srgbClr val="080808"/>
+                </a:solidFill>
+                <a:effectLst/>
+                <a:latin typeface="JetBrains Mono"/>
+              </a:rPr>
+              <a:t>.</a:t>
+            </a:r>
+            <a:r>
+              <a:rPr lang="en-US" sz="1800" dirty="0" err="1">
+                <a:solidFill>
+                  <a:srgbClr val="0033B3"/>
+                </a:solidFill>
+                <a:effectLst/>
+                <a:latin typeface="JetBrains Mono"/>
+              </a:rPr>
+              <a:t>super</a:t>
+            </a:r>
+            <a:r>
+              <a:rPr lang="en-US" sz="1800" dirty="0" err="1">
+                <a:solidFill>
+                  <a:srgbClr val="080808"/>
+                </a:solidFill>
+                <a:effectLst/>
+                <a:latin typeface="JetBrains Mono"/>
+              </a:rPr>
+              <a:t>.show</a:t>
+            </a:r>
+            <a:r>
+              <a:rPr lang="en-US" sz="1800" dirty="0">
+                <a:solidFill>
+                  <a:srgbClr val="080808"/>
+                </a:solidFill>
+                <a:effectLst/>
+                <a:latin typeface="JetBrains Mono"/>
+              </a:rPr>
+              <a:t>();</a:t>
+            </a:r>
+            <a:br>
+              <a:rPr lang="en-US" sz="1800" dirty="0">
+                <a:solidFill>
+                  <a:srgbClr val="080808"/>
+                </a:solidFill>
+                <a:effectLst/>
+                <a:latin typeface="JetBrains Mono"/>
+              </a:rPr>
+            </a:br>
+            <a:r>
+              <a:rPr lang="en-US" sz="1800" dirty="0">
+                <a:solidFill>
+                  <a:srgbClr val="080808"/>
+                </a:solidFill>
+                <a:effectLst/>
+                <a:latin typeface="JetBrains Mono"/>
+              </a:rPr>
+              <a:t>    }</a:t>
+            </a:r>
+            <a:br>
+              <a:rPr lang="en-US" sz="1800" dirty="0">
+                <a:solidFill>
+                  <a:srgbClr val="080808"/>
+                </a:solidFill>
+                <a:effectLst/>
+                <a:latin typeface="JetBrains Mono"/>
+              </a:rPr>
+            </a:br>
+            <a:r>
+              <a:rPr lang="en-US" sz="1800" dirty="0">
+                <a:solidFill>
+                  <a:srgbClr val="080808"/>
+                </a:solidFill>
+                <a:effectLst/>
+                <a:latin typeface="JetBrains Mono"/>
+              </a:rPr>
+              <a:t>}</a:t>
+            </a:r>
+            <a:br>
+              <a:rPr lang="en-US" sz="1800" dirty="0">
+                <a:solidFill>
+                  <a:srgbClr val="080808"/>
+                </a:solidFill>
+                <a:effectLst/>
+                <a:latin typeface="JetBrains Mono"/>
+              </a:rPr>
+            </a:br>
+            <a:r>
+              <a:rPr lang="en-US" sz="1800" dirty="0">
+                <a:solidFill>
+                  <a:srgbClr val="0033B3"/>
+                </a:solidFill>
+                <a:effectLst/>
+                <a:latin typeface="JetBrains Mono"/>
+              </a:rPr>
+              <a:t>public class </a:t>
+            </a:r>
+            <a:r>
+              <a:rPr lang="en-US" sz="1800" dirty="0">
+                <a:solidFill>
+                  <a:srgbClr val="000000"/>
+                </a:solidFill>
+                <a:effectLst/>
+                <a:latin typeface="JetBrains Mono"/>
+              </a:rPr>
+              <a:t>Main </a:t>
+            </a:r>
+            <a:r>
+              <a:rPr lang="en-US" sz="1800" dirty="0">
+                <a:solidFill>
+                  <a:srgbClr val="080808"/>
+                </a:solidFill>
+                <a:effectLst/>
+                <a:latin typeface="JetBrains Mono"/>
+              </a:rPr>
+              <a:t>{</a:t>
+            </a:r>
+            <a:br>
+              <a:rPr lang="en-US" sz="1800" dirty="0">
+                <a:solidFill>
+                  <a:srgbClr val="080808"/>
+                </a:solidFill>
+                <a:effectLst/>
+                <a:latin typeface="JetBrains Mono"/>
+              </a:rPr>
+            </a:br>
+            <a:r>
+              <a:rPr lang="en-US" sz="1800" dirty="0">
+                <a:solidFill>
+                  <a:srgbClr val="080808"/>
+                </a:solidFill>
+                <a:effectLst/>
+                <a:latin typeface="JetBrains Mono"/>
+              </a:rPr>
+              <a:t>    </a:t>
+            </a:r>
+            <a:r>
+              <a:rPr lang="en-US" sz="1800" dirty="0">
+                <a:solidFill>
+                  <a:srgbClr val="0033B3"/>
+                </a:solidFill>
+                <a:effectLst/>
+                <a:latin typeface="JetBrains Mono"/>
+              </a:rPr>
+              <a:t>public static void </a:t>
+            </a:r>
+            <a:r>
+              <a:rPr lang="en-US" sz="1800" dirty="0">
+                <a:solidFill>
+                  <a:srgbClr val="00627A"/>
+                </a:solidFill>
+                <a:effectLst/>
+                <a:latin typeface="JetBrains Mono"/>
+              </a:rPr>
+              <a:t>main</a:t>
+            </a:r>
+            <a:r>
+              <a:rPr lang="en-US" sz="1800" dirty="0">
+                <a:solidFill>
+                  <a:srgbClr val="080808"/>
+                </a:solidFill>
+                <a:effectLst/>
+                <a:latin typeface="JetBrains Mono"/>
+              </a:rPr>
+              <a:t>(</a:t>
+            </a:r>
+            <a:r>
+              <a:rPr lang="en-US" sz="1800" dirty="0">
+                <a:solidFill>
+                  <a:srgbClr val="000000"/>
+                </a:solidFill>
+                <a:effectLst/>
+                <a:latin typeface="JetBrains Mono"/>
+              </a:rPr>
+              <a:t>String</a:t>
+            </a:r>
+            <a:r>
+              <a:rPr lang="en-US" sz="1800" dirty="0">
+                <a:solidFill>
+                  <a:srgbClr val="080808"/>
+                </a:solidFill>
+                <a:effectLst/>
+                <a:latin typeface="JetBrains Mono"/>
+              </a:rPr>
+              <a:t>[] </a:t>
+            </a:r>
+            <a:r>
+              <a:rPr lang="en-US" sz="1800" dirty="0" err="1">
+                <a:solidFill>
+                  <a:srgbClr val="000000"/>
+                </a:solidFill>
+                <a:effectLst/>
+                <a:latin typeface="JetBrains Mono"/>
+              </a:rPr>
+              <a:t>args</a:t>
+            </a:r>
+            <a:r>
+              <a:rPr lang="en-US" sz="1800" dirty="0">
+                <a:solidFill>
+                  <a:srgbClr val="080808"/>
+                </a:solidFill>
+                <a:effectLst/>
+                <a:latin typeface="JetBrains Mono"/>
+              </a:rPr>
+              <a:t>)</a:t>
+            </a:r>
+            <a:br>
+              <a:rPr lang="en-US" sz="1800" dirty="0">
+                <a:solidFill>
+                  <a:srgbClr val="080808"/>
+                </a:solidFill>
+                <a:effectLst/>
+                <a:latin typeface="JetBrains Mono"/>
+              </a:rPr>
+            </a:br>
+            <a:r>
+              <a:rPr lang="en-US" sz="1800" dirty="0">
+                <a:solidFill>
+                  <a:srgbClr val="080808"/>
+                </a:solidFill>
+                <a:effectLst/>
+                <a:latin typeface="JetBrains Mono"/>
+              </a:rPr>
+              <a:t>    {</a:t>
+            </a:r>
+            <a:br>
+              <a:rPr lang="en-US" sz="1800" dirty="0">
+                <a:solidFill>
+                  <a:srgbClr val="080808"/>
+                </a:solidFill>
+                <a:effectLst/>
+                <a:latin typeface="JetBrains Mono"/>
+              </a:rPr>
+            </a:br>
+            <a:r>
+              <a:rPr lang="en-US" sz="1800" dirty="0">
+                <a:solidFill>
+                  <a:srgbClr val="080808"/>
+                </a:solidFill>
+                <a:effectLst/>
+                <a:latin typeface="JetBrains Mono"/>
+              </a:rPr>
+              <a:t>        </a:t>
+            </a:r>
+            <a:r>
+              <a:rPr lang="en-US" sz="1800" dirty="0">
+                <a:solidFill>
+                  <a:srgbClr val="000000"/>
+                </a:solidFill>
+                <a:effectLst/>
+                <a:latin typeface="JetBrains Mono"/>
+              </a:rPr>
+              <a:t>Demo d </a:t>
+            </a:r>
+            <a:r>
+              <a:rPr lang="en-US" sz="1800" dirty="0">
+                <a:solidFill>
+                  <a:srgbClr val="080808"/>
+                </a:solidFill>
+                <a:effectLst/>
+                <a:latin typeface="JetBrains Mono"/>
+              </a:rPr>
+              <a:t>= </a:t>
+            </a:r>
+            <a:r>
+              <a:rPr lang="en-US" sz="1800" dirty="0">
+                <a:solidFill>
+                  <a:srgbClr val="0033B3"/>
+                </a:solidFill>
+                <a:effectLst/>
+                <a:latin typeface="JetBrains Mono"/>
+              </a:rPr>
+              <a:t>new </a:t>
+            </a:r>
+            <a:r>
+              <a:rPr lang="en-US" sz="1800" dirty="0">
+                <a:solidFill>
+                  <a:srgbClr val="080808"/>
+                </a:solidFill>
+                <a:effectLst/>
+                <a:latin typeface="JetBrains Mono"/>
+              </a:rPr>
+              <a:t>Demo();</a:t>
+            </a:r>
+            <a:br>
+              <a:rPr lang="en-US" sz="1800" dirty="0">
+                <a:solidFill>
+                  <a:srgbClr val="080808"/>
+                </a:solidFill>
+                <a:effectLst/>
+                <a:latin typeface="JetBrains Mono"/>
+              </a:rPr>
+            </a:br>
+            <a:r>
+              <a:rPr lang="en-US" sz="1800" dirty="0">
+                <a:solidFill>
+                  <a:srgbClr val="080808"/>
+                </a:solidFill>
+                <a:effectLst/>
+                <a:latin typeface="JetBrains Mono"/>
+              </a:rPr>
+              <a:t>        </a:t>
+            </a:r>
+            <a:r>
+              <a:rPr lang="en-US" sz="1800" dirty="0" err="1">
+                <a:solidFill>
+                  <a:srgbClr val="000000"/>
+                </a:solidFill>
+                <a:effectLst/>
+                <a:latin typeface="JetBrains Mono"/>
+              </a:rPr>
+              <a:t>d</a:t>
+            </a:r>
+            <a:r>
+              <a:rPr lang="en-US" sz="1800" dirty="0" err="1">
+                <a:solidFill>
+                  <a:srgbClr val="080808"/>
+                </a:solidFill>
+                <a:effectLst/>
+                <a:latin typeface="JetBrains Mono"/>
+              </a:rPr>
+              <a:t>.show</a:t>
+            </a:r>
+            <a:r>
+              <a:rPr lang="en-US" sz="1800" dirty="0">
+                <a:solidFill>
+                  <a:srgbClr val="080808"/>
+                </a:solidFill>
+                <a:effectLst/>
+                <a:latin typeface="JetBrains Mono"/>
+              </a:rPr>
+              <a:t>();</a:t>
+            </a:r>
+            <a:br>
+              <a:rPr lang="en-US" sz="1800" dirty="0">
+                <a:solidFill>
+                  <a:srgbClr val="080808"/>
+                </a:solidFill>
+                <a:effectLst/>
+                <a:latin typeface="JetBrains Mono"/>
+              </a:rPr>
+            </a:br>
+            <a:r>
+              <a:rPr lang="en-US" sz="1800" dirty="0">
+                <a:solidFill>
+                  <a:srgbClr val="080808"/>
+                </a:solidFill>
+                <a:effectLst/>
+                <a:latin typeface="JetBrains Mono"/>
+              </a:rPr>
+              <a:t>    }</a:t>
+            </a:r>
+            <a:br>
+              <a:rPr lang="en-US" sz="1800" dirty="0">
+                <a:solidFill>
+                  <a:srgbClr val="080808"/>
+                </a:solidFill>
+                <a:effectLst/>
+                <a:latin typeface="JetBrains Mono"/>
+              </a:rPr>
+            </a:br>
+            <a:r>
+              <a:rPr lang="en-US" sz="1800" dirty="0">
+                <a:solidFill>
+                  <a:srgbClr val="080808"/>
+                </a:solidFill>
+                <a:effectLst/>
+                <a:latin typeface="JetBrains Mono"/>
+              </a:rPr>
+              <a:t>}</a:t>
+            </a:r>
+          </a:p>
+        </p:txBody>
+      </p:sp>
+      <p:sp>
+        <p:nvSpPr>
+          <p:cNvPr id="4" name="Rectangle 1">
+            <a:extLst>
+              <a:ext uri="{FF2B5EF4-FFF2-40B4-BE49-F238E27FC236}">
+                <a16:creationId xmlns:a16="http://schemas.microsoft.com/office/drawing/2014/main" id="{37D9ED32-3DB7-551D-DE45-76E5687A1777}"/>
+              </a:ext>
+            </a:extLst>
+          </p:cNvPr>
+          <p:cNvSpPr>
+            <a:spLocks noChangeArrowheads="1"/>
+          </p:cNvSpPr>
+          <p:nvPr/>
+        </p:nvSpPr>
+        <p:spPr bwMode="auto">
+          <a:xfrm>
+            <a:off x="126460" y="2505671"/>
+            <a:ext cx="4066161" cy="1200329"/>
+          </a:xfrm>
+          <a:prstGeom prst="rect">
+            <a:avLst/>
+          </a:prstGeom>
+          <a:noFill/>
+          <a:ln>
+            <a:noFill/>
+          </a:ln>
+          <a:effectLst/>
+          <a:extLst>
+            <a:ext uri="{909E8E84-426E-40DD-AFC4-6F175D3DCCD1}">
+              <a14:hiddenFill xmlns:a14="http://schemas.microsoft.com/office/drawing/2010/main">
+                <a:solidFill>
+                  <a:schemeClr val="accent1"/>
+                </a:solidFill>
+              </a14:hiddenFill>
+            </a:ext>
+            <a:ext uri="{91240B29-F687-4F45-9708-019B960494DF}">
+              <a14:hiddenLine xmlns:a14="http://schemas.microsoft.com/office/drawing/2010/main" w="9525">
+                <a:solidFill>
+                  <a:schemeClr val="tx1"/>
+                </a:solidFill>
+                <a:miter lim="800000"/>
+                <a:headEnd/>
+                <a:tailEnd/>
+              </a14:hiddenLine>
+            </a:ext>
+            <a:ext uri="{AF507438-7753-43E0-B8FC-AC1667EBCBE1}">
+              <a14:hiddenEffects xmlns:a14="http://schemas.microsoft.com/office/drawing/2010/main">
+                <a:effectLst>
+                  <a:outerShdw dist="35921" dir="2700000" algn="ctr" rotWithShape="0">
+                    <a:schemeClr val="bg2"/>
+                  </a:outerShdw>
+                </a:effectLst>
+              </a14:hiddenEffects>
+            </a:ext>
+          </a:extLst>
+        </p:spPr>
+        <p:txBody>
+          <a:bodyPr vert="horz" wrap="square" lIns="91440" tIns="45720" rIns="91440" bIns="45720" numCol="1" anchor="ctr" anchorCtr="0" compatLnSpc="1">
+            <a:prstTxWarp prst="textNoShape">
+              <a:avLst/>
+            </a:prstTxWarp>
+            <a:spAutoFit/>
+          </a:bodyPr>
+          <a:lstStyle/>
+          <a:p>
+            <a:pPr lvl="0" eaLnBrk="0" fontAlgn="base" hangingPunct="0">
+              <a:spcBef>
+                <a:spcPct val="0"/>
+              </a:spcBef>
+              <a:spcAft>
+                <a:spcPct val="0"/>
+              </a:spcAft>
+              <a:buClrTx/>
+            </a:pPr>
+            <a:r>
+              <a:rPr lang="en-US" sz="1800" b="1" dirty="0"/>
+              <a:t>Solution to Diamond Problem</a:t>
+            </a:r>
+          </a:p>
+          <a:p>
+            <a:pPr lvl="0" eaLnBrk="0" fontAlgn="base" hangingPunct="0">
+              <a:spcBef>
+                <a:spcPct val="0"/>
+              </a:spcBef>
+              <a:spcAft>
+                <a:spcPct val="0"/>
+              </a:spcAft>
+              <a:buClrTx/>
+            </a:pPr>
+            <a:endParaRPr lang="en-US" sz="1800" dirty="0"/>
+          </a:p>
+          <a:p>
+            <a:pPr lvl="0" eaLnBrk="0" fontAlgn="base" hangingPunct="0">
+              <a:spcBef>
+                <a:spcPct val="0"/>
+              </a:spcBef>
+              <a:spcAft>
+                <a:spcPct val="0"/>
+              </a:spcAft>
+              <a:buClrTx/>
+              <a:buFontTx/>
+              <a:buChar char="•"/>
+            </a:pPr>
+            <a:r>
+              <a:rPr lang="en-US" sz="1800" dirty="0"/>
+              <a:t>    Java forces explicit override to resolve </a:t>
+            </a:r>
+            <a:r>
+              <a:rPr lang="en-US" sz="1800" b="1" dirty="0"/>
+              <a:t>default method conflicts</a:t>
+            </a:r>
+            <a:r>
+              <a:rPr lang="en-US" sz="1800" dirty="0"/>
+              <a:t>.</a:t>
+            </a:r>
+            <a:endParaRPr kumimoji="0" lang="en-US" altLang="en-US" sz="1800" b="0" i="0" u="none" strike="noStrike" cap="none" normalizeH="0" baseline="0" dirty="0">
+              <a:ln>
+                <a:noFill/>
+              </a:ln>
+              <a:solidFill>
+                <a:schemeClr val="tx1"/>
+              </a:solidFill>
+              <a:effectLst/>
+              <a:latin typeface="Arial" panose="020B0604020202020204" pitchFamily="34" charset="0"/>
+            </a:endParaRPr>
+          </a:p>
+        </p:txBody>
+      </p:sp>
+      <p:pic>
+        <p:nvPicPr>
+          <p:cNvPr id="6" name="Picture 5">
+            <a:extLst>
+              <a:ext uri="{FF2B5EF4-FFF2-40B4-BE49-F238E27FC236}">
+                <a16:creationId xmlns:a16="http://schemas.microsoft.com/office/drawing/2014/main" id="{83D0AB48-DA0F-CF3F-8EB3-04AC4B631E0F}"/>
+              </a:ext>
+            </a:extLst>
+          </p:cNvPr>
+          <p:cNvPicPr>
+            <a:picLocks noChangeAspect="1"/>
+          </p:cNvPicPr>
+          <p:nvPr/>
+        </p:nvPicPr>
+        <p:blipFill>
+          <a:blip r:embed="rId3"/>
+          <a:stretch>
+            <a:fillRect/>
+          </a:stretch>
+        </p:blipFill>
+        <p:spPr>
+          <a:xfrm>
+            <a:off x="704951" y="5549528"/>
+            <a:ext cx="2105025" cy="447675"/>
+          </a:xfrm>
+          <a:prstGeom prst="rect">
+            <a:avLst/>
+          </a:prstGeom>
+        </p:spPr>
+      </p:pic>
+    </p:spTree>
+    <p:extLst>
+      <p:ext uri="{BB962C8B-B14F-4D97-AF65-F5344CB8AC3E}">
+        <p14:creationId xmlns:p14="http://schemas.microsoft.com/office/powerpoint/2010/main" val="2167495666"/>
+      </p:ext>
+    </p:extLst>
+  </p:cSld>
+  <p:clrMapOvr>
+    <a:masterClrMapping/>
+  </p:clrMapOvr>
+</p:sld>
+</file>
+
+<file path=ppt/slides/slide17.xml><?xml version="1.0" encoding="utf-8"?>
 <p:sld xmlns:a="http://schemas.openxmlformats.org/drawingml/2006/main" xmlns:r="http://schemas.openxmlformats.org/officeDocument/2006/relationships" xmlns:p="http://schemas.openxmlformats.org/presentationml/2006/main">
   <p:cSld>
     <p:spTree>
@@ -22565,7 +25273,7 @@
 </p:sld>
 </file>
 
-<file path=ppt/slides/slide16.xml><?xml version="1.0" encoding="utf-8"?>
+<file path=ppt/slides/slide18.xml><?xml version="1.0" encoding="utf-8"?>
 <p:sld xmlns:a="http://schemas.openxmlformats.org/drawingml/2006/main" xmlns:r="http://schemas.openxmlformats.org/officeDocument/2006/relationships" xmlns:p="http://schemas.openxmlformats.org/presentationml/2006/main">
   <p:cSld>
     <p:spTree>
